--- a/docs/nop-bai/CUSTOS-PITCH.pptx
+++ b/docs/nop-bai/CUSTOS-PITCH.pptx
@@ -1669,7 +1669,7 @@
     <p:bg>
       <p:bgPr>
         <a:solidFill>
-          <a:srgbClr val="0A0F1C"/>
+          <a:srgbClr val="F7F6F2"/>
         </a:solidFill>
       </p:bgPr>
     </p:bg>
@@ -1734,7 +1734,7 @@
             <a:r>
               <a:rPr lang="en-US" sz="6400" b="1" dirty="0">
                 <a:solidFill>
-                  <a:srgbClr val="E8EDF5"/>
+                  <a:srgbClr val="14181F"/>
                 </a:solidFill>
                 <a:latin typeface="Trebuchet MS" pitchFamily="34" charset="0"/>
                 <a:ea typeface="Trebuchet MS" pitchFamily="34" charset="-122"/>
@@ -1773,7 +1773,7 @@
             <a:r>
               <a:rPr lang="en-US" sz="1900" dirty="0">
                 <a:solidFill>
-                  <a:srgbClr val="F5A524"/>
+                  <a:srgbClr val="B45309"/>
                 </a:solidFill>
                 <a:latin typeface="Calibri" pitchFamily="34" charset="0"/>
                 <a:ea typeface="Calibri" pitchFamily="34" charset="-122"/>
@@ -1815,7 +1815,7 @@
             <a:r>
               <a:rPr lang="en-US" sz="1500" dirty="0">
                 <a:solidFill>
-                  <a:srgbClr val="94A3B8"/>
+                  <a:srgbClr val="525A66"/>
                 </a:solidFill>
                 <a:latin typeface="Calibri" pitchFamily="34" charset="0"/>
                 <a:ea typeface="Calibri" pitchFamily="34" charset="-122"/>
@@ -1835,7 +1835,7 @@
             <a:r>
               <a:rPr lang="en-US" sz="1500" dirty="0">
                 <a:solidFill>
-                  <a:srgbClr val="94A3B8"/>
+                  <a:srgbClr val="525A66"/>
                 </a:solidFill>
                 <a:latin typeface="Calibri" pitchFamily="34" charset="0"/>
                 <a:ea typeface="Calibri" pitchFamily="34" charset="-122"/>
@@ -1874,7 +1874,7 @@
             <a:r>
               <a:rPr lang="en-US" sz="1050" b="1" spc="120" kern="0" dirty="0">
                 <a:solidFill>
-                  <a:srgbClr val="64748B"/>
+                  <a:srgbClr val="5E6673"/>
                 </a:solidFill>
                 <a:latin typeface="Consolas" pitchFamily="34" charset="0"/>
                 <a:ea typeface="Consolas" pitchFamily="34" charset="-122"/>
@@ -1913,7 +1913,7 @@
             <a:r>
               <a:rPr lang="en-US" sz="1100" dirty="0">
                 <a:solidFill>
-                  <a:srgbClr val="64748B"/>
+                  <a:srgbClr val="5E6673"/>
                 </a:solidFill>
                 <a:latin typeface="Consolas" pitchFamily="34" charset="0"/>
                 <a:ea typeface="Consolas" pitchFamily="34" charset="-122"/>
@@ -1939,7 +1939,7 @@
     <p:bg>
       <p:bgPr>
         <a:solidFill>
-          <a:srgbClr val="060A14"/>
+          <a:srgbClr val="EFEDE6"/>
         </a:solidFill>
       </p:bgPr>
     </p:bg>
@@ -2007,7 +2007,7 @@
             <a:r>
               <a:rPr lang="en-US" sz="3800" b="1" dirty="0">
                 <a:solidFill>
-                  <a:srgbClr val="E8EDF5"/>
+                  <a:srgbClr val="14181F"/>
                 </a:solidFill>
                 <a:latin typeface="Trebuchet MS" pitchFamily="34" charset="0"/>
                 <a:ea typeface="Trebuchet MS" pitchFamily="34" charset="-122"/>
@@ -2027,7 +2027,7 @@
             <a:r>
               <a:rPr lang="en-US" sz="3800" b="1" dirty="0">
                 <a:solidFill>
-                  <a:srgbClr val="E8EDF5"/>
+                  <a:srgbClr val="14181F"/>
                 </a:solidFill>
                 <a:latin typeface="Trebuchet MS" pitchFamily="34" charset="0"/>
                 <a:ea typeface="Trebuchet MS" pitchFamily="34" charset="-122"/>
@@ -2066,7 +2066,7 @@
             <a:r>
               <a:rPr lang="en-US" sz="1800" dirty="0">
                 <a:solidFill>
-                  <a:srgbClr val="F5A524"/>
+                  <a:srgbClr val="B45309"/>
                 </a:solidFill>
                 <a:latin typeface="Calibri" pitchFamily="34" charset="0"/>
                 <a:ea typeface="Calibri" pitchFamily="34" charset="-122"/>
@@ -2108,7 +2108,7 @@
             <a:r>
               <a:rPr lang="en-US" sz="1300" dirty="0">
                 <a:solidFill>
-                  <a:srgbClr val="94A3B8"/>
+                  <a:srgbClr val="525A66"/>
                 </a:solidFill>
                 <a:latin typeface="Consolas" pitchFamily="34" charset="0"/>
                 <a:ea typeface="Consolas" pitchFamily="34" charset="-122"/>
@@ -2128,7 +2128,7 @@
             <a:r>
               <a:rPr lang="en-US" sz="1300" dirty="0">
                 <a:solidFill>
-                  <a:srgbClr val="94A3B8"/>
+                  <a:srgbClr val="525A66"/>
                 </a:solidFill>
                 <a:latin typeface="Consolas" pitchFamily="34" charset="0"/>
                 <a:ea typeface="Consolas" pitchFamily="34" charset="-122"/>
@@ -2148,7 +2148,7 @@
             <a:r>
               <a:rPr lang="en-US" sz="1300" dirty="0">
                 <a:solidFill>
-                  <a:srgbClr val="94A3B8"/>
+                  <a:srgbClr val="525A66"/>
                 </a:solidFill>
                 <a:latin typeface="Consolas" pitchFamily="34" charset="0"/>
                 <a:ea typeface="Consolas" pitchFamily="34" charset="-122"/>
@@ -2174,7 +2174,7 @@
     <p:bg>
       <p:bgPr>
         <a:solidFill>
-          <a:srgbClr val="0A0F1C"/>
+          <a:srgbClr val="F7F6F2"/>
         </a:solidFill>
       </p:bgPr>
     </p:bg>
@@ -2239,7 +2239,7 @@
             <a:r>
               <a:rPr lang="en-US" sz="3400" b="1" dirty="0">
                 <a:solidFill>
-                  <a:srgbClr val="E8EDF5"/>
+                  <a:srgbClr val="14181F"/>
                 </a:solidFill>
                 <a:latin typeface="Trebuchet MS" pitchFamily="34" charset="0"/>
                 <a:ea typeface="Trebuchet MS" pitchFamily="34" charset="-122"/>
@@ -2268,11 +2268,11 @@
             </a:avLst>
           </a:prstGeom>
           <a:solidFill>
-            <a:srgbClr val="151E33"/>
+            <a:srgbClr val="FFFFFF"/>
           </a:solidFill>
           <a:ln w="12700">
             <a:solidFill>
-              <a:srgbClr val="2A3852"/>
+              <a:srgbClr val="DCD9D0"/>
             </a:solidFill>
             <a:prstDash val="solid"/>
           </a:ln>
@@ -2305,7 +2305,7 @@
             <a:r>
               <a:rPr lang="en-US" sz="1050" b="1" spc="120" kern="0" dirty="0">
                 <a:solidFill>
-                  <a:srgbClr val="64748B"/>
+                  <a:srgbClr val="5E6673"/>
                 </a:solidFill>
                 <a:latin typeface="Consolas" pitchFamily="34" charset="0"/>
                 <a:ea typeface="Consolas" pitchFamily="34" charset="-122"/>
@@ -2347,7 +2347,7 @@
             <a:r>
               <a:rPr lang="en-US" sz="1300" dirty="0">
                 <a:solidFill>
-                  <a:srgbClr val="94A3B8"/>
+                  <a:srgbClr val="525A66"/>
                 </a:solidFill>
                 <a:latin typeface="Consolas" pitchFamily="34" charset="0"/>
                 <a:ea typeface="Consolas" pitchFamily="34" charset="-122"/>
@@ -2367,7 +2367,7 @@
             <a:r>
               <a:rPr lang="en-US" sz="1300" dirty="0">
                 <a:solidFill>
-                  <a:srgbClr val="94A3B8"/>
+                  <a:srgbClr val="525A66"/>
                 </a:solidFill>
                 <a:latin typeface="Consolas" pitchFamily="34" charset="0"/>
                 <a:ea typeface="Consolas" pitchFamily="34" charset="-122"/>
@@ -2387,7 +2387,7 @@
             <a:r>
               <a:rPr lang="en-US" sz="1300" dirty="0">
                 <a:solidFill>
-                  <a:srgbClr val="94A3B8"/>
+                  <a:srgbClr val="525A66"/>
                 </a:solidFill>
                 <a:latin typeface="Consolas" pitchFamily="34" charset="0"/>
                 <a:ea typeface="Consolas" pitchFamily="34" charset="-122"/>
@@ -2407,7 +2407,7 @@
             <a:r>
               <a:rPr lang="en-US" sz="1300" dirty="0">
                 <a:solidFill>
-                  <a:srgbClr val="94A3B8"/>
+                  <a:srgbClr val="525A66"/>
                 </a:solidFill>
                 <a:latin typeface="Consolas" pitchFamily="34" charset="0"/>
                 <a:ea typeface="Consolas" pitchFamily="34" charset="-122"/>
@@ -2427,7 +2427,7 @@
             <a:r>
               <a:rPr lang="en-US" sz="1300" dirty="0">
                 <a:solidFill>
-                  <a:srgbClr val="94A3B8"/>
+                  <a:srgbClr val="525A66"/>
                 </a:solidFill>
                 <a:latin typeface="Consolas" pitchFamily="34" charset="0"/>
                 <a:ea typeface="Consolas" pitchFamily="34" charset="-122"/>
@@ -2456,7 +2456,7 @@
             </a:avLst>
           </a:prstGeom>
           <a:solidFill>
-            <a:srgbClr val="1E2A44"/>
+            <a:srgbClr val="FDF3E3"/>
           </a:solidFill>
           <a:ln w="12700">
             <a:solidFill>
@@ -2493,7 +2493,7 @@
             <a:r>
               <a:rPr lang="en-US" sz="1050" b="1" spc="120" kern="0" dirty="0">
                 <a:solidFill>
-                  <a:srgbClr val="F5A524"/>
+                  <a:srgbClr val="B45309"/>
                 </a:solidFill>
                 <a:latin typeface="Consolas" pitchFamily="34" charset="0"/>
                 <a:ea typeface="Consolas" pitchFamily="34" charset="-122"/>
@@ -2535,7 +2535,7 @@
             <a:r>
               <a:rPr lang="en-US" sz="1900" dirty="0">
                 <a:solidFill>
-                  <a:srgbClr val="E8EDF5"/>
+                  <a:srgbClr val="14181F"/>
                 </a:solidFill>
                 <a:latin typeface="Calibri" pitchFamily="34" charset="0"/>
                 <a:ea typeface="Calibri" pitchFamily="34" charset="-122"/>
@@ -2555,7 +2555,7 @@
             <a:r>
               <a:rPr lang="en-US" sz="1900" dirty="0">
                 <a:solidFill>
-                  <a:srgbClr val="E8EDF5"/>
+                  <a:srgbClr val="14181F"/>
                 </a:solidFill>
                 <a:latin typeface="Calibri" pitchFamily="34" charset="0"/>
                 <a:ea typeface="Calibri" pitchFamily="34" charset="-122"/>
@@ -2584,7 +2584,7 @@
             <a:r>
               <a:rPr lang="en-US" sz="1900" dirty="0">
                 <a:solidFill>
-                  <a:srgbClr val="E8EDF5"/>
+                  <a:srgbClr val="14181F"/>
                 </a:solidFill>
                 <a:latin typeface="Calibri" pitchFamily="34" charset="0"/>
                 <a:ea typeface="Calibri" pitchFamily="34" charset="-122"/>
@@ -2623,7 +2623,7 @@
             <a:r>
               <a:rPr lang="en-US" sz="1600" i="1" dirty="0">
                 <a:solidFill>
-                  <a:srgbClr val="F5A524"/>
+                  <a:srgbClr val="B45309"/>
                 </a:solidFill>
                 <a:latin typeface="Calibri" pitchFamily="34" charset="0"/>
                 <a:ea typeface="Calibri" pitchFamily="34" charset="-122"/>
@@ -2649,7 +2649,7 @@
     <p:bg>
       <p:bgPr>
         <a:solidFill>
-          <a:srgbClr val="0A0F1C"/>
+          <a:srgbClr val="F7F6F2"/>
         </a:solidFill>
       </p:bgPr>
     </p:bg>
@@ -2714,7 +2714,7 @@
             <a:r>
               <a:rPr lang="en-US" sz="3400" b="1" dirty="0">
                 <a:solidFill>
-                  <a:srgbClr val="E8EDF5"/>
+                  <a:srgbClr val="14181F"/>
                 </a:solidFill>
                 <a:latin typeface="Trebuchet MS" pitchFamily="34" charset="0"/>
                 <a:ea typeface="Trebuchet MS" pitchFamily="34" charset="-122"/>
@@ -2743,11 +2743,11 @@
             </a:avLst>
           </a:prstGeom>
           <a:solidFill>
-            <a:srgbClr val="151E33"/>
+            <a:srgbClr val="FFFFFF"/>
           </a:solidFill>
           <a:ln w="12700">
             <a:solidFill>
-              <a:srgbClr val="2A3852"/>
+              <a:srgbClr val="DCD9D0"/>
             </a:solidFill>
             <a:prstDash val="solid"/>
           </a:ln>
@@ -2780,7 +2780,7 @@
             <a:r>
               <a:rPr lang="en-US" sz="1700" dirty="0">
                 <a:solidFill>
-                  <a:srgbClr val="94A3B8"/>
+                  <a:srgbClr val="525A66"/>
                 </a:solidFill>
                 <a:latin typeface="Calibri" pitchFamily="34" charset="0"/>
                 <a:ea typeface="Calibri" pitchFamily="34" charset="-122"/>
@@ -2809,7 +2809,7 @@
             </a:avLst>
           </a:prstGeom>
           <a:solidFill>
-            <a:srgbClr val="1E2A44"/>
+            <a:srgbClr val="FDF3E3"/>
           </a:solidFill>
           <a:ln w="12700">
             <a:solidFill>
@@ -2846,7 +2846,7 @@
             <a:r>
               <a:rPr lang="en-US" sz="2300" b="1" dirty="0">
                 <a:solidFill>
-                  <a:srgbClr val="E8EDF5"/>
+                  <a:srgbClr val="14181F"/>
                 </a:solidFill>
                 <a:latin typeface="Trebuchet MS" pitchFamily="34" charset="0"/>
                 <a:ea typeface="Trebuchet MS" pitchFamily="34" charset="-122"/>
@@ -2885,7 +2885,7 @@
             <a:r>
               <a:rPr lang="en-US" sz="2300" b="1" dirty="0">
                 <a:solidFill>
-                  <a:srgbClr val="F5A524"/>
+                  <a:srgbClr val="B45309"/>
                 </a:solidFill>
                 <a:latin typeface="Trebuchet MS" pitchFamily="34" charset="0"/>
                 <a:ea typeface="Trebuchet MS" pitchFamily="34" charset="-122"/>
@@ -2924,7 +2924,7 @@
             <a:r>
               <a:rPr lang="en-US" sz="1350" dirty="0">
                 <a:solidFill>
-                  <a:srgbClr val="94A3B8"/>
+                  <a:srgbClr val="525A66"/>
                 </a:solidFill>
                 <a:latin typeface="Calibri" pitchFamily="34" charset="0"/>
                 <a:ea typeface="Calibri" pitchFamily="34" charset="-122"/>
@@ -2963,7 +2963,7 @@
             <a:r>
               <a:rPr lang="en-US" sz="1050" b="1" spc="120" kern="0" dirty="0">
                 <a:solidFill>
-                  <a:srgbClr val="34D399"/>
+                  <a:srgbClr val="047857"/>
                 </a:solidFill>
                 <a:latin typeface="Consolas" pitchFamily="34" charset="0"/>
                 <a:ea typeface="Consolas" pitchFamily="34" charset="-122"/>
@@ -3002,7 +3002,7 @@
             <a:r>
               <a:rPr lang="en-US" sz="1600" dirty="0">
                 <a:solidFill>
-                  <a:srgbClr val="E8EDF5"/>
+                  <a:srgbClr val="14181F"/>
                 </a:solidFill>
                 <a:latin typeface="Consolas" pitchFamily="34" charset="0"/>
                 <a:ea typeface="Consolas" pitchFamily="34" charset="-122"/>
@@ -3028,7 +3028,7 @@
     <p:bg>
       <p:bgPr>
         <a:solidFill>
-          <a:srgbClr val="060A14"/>
+          <a:srgbClr val="EFEDE6"/>
         </a:solidFill>
       </p:bgPr>
     </p:bg>
@@ -3061,7 +3061,7 @@
             <a:avLst/>
           </a:prstGeom>
           <a:solidFill>
-            <a:srgbClr val="FB7185"/>
+            <a:srgbClr val="E11D48"/>
           </a:solidFill>
           <a:ln/>
         </p:spPr>
@@ -3093,7 +3093,7 @@
             <a:r>
               <a:rPr lang="en-US" sz="5400" b="1" spc="300" kern="0" dirty="0">
                 <a:solidFill>
-                  <a:srgbClr val="E8EDF5"/>
+                  <a:srgbClr val="14181F"/>
                 </a:solidFill>
                 <a:latin typeface="Trebuchet MS" pitchFamily="34" charset="0"/>
                 <a:ea typeface="Trebuchet MS" pitchFamily="34" charset="-122"/>
@@ -3132,7 +3132,7 @@
             <a:r>
               <a:rPr lang="en-US" sz="2000" dirty="0">
                 <a:solidFill>
-                  <a:srgbClr val="FB7185"/>
+                  <a:srgbClr val="BE123C"/>
                 </a:solidFill>
                 <a:latin typeface="Calibri" pitchFamily="34" charset="0"/>
                 <a:ea typeface="Calibri" pitchFamily="34" charset="-122"/>
@@ -3159,11 +3159,11 @@
             <a:avLst/>
           </a:prstGeom>
           <a:solidFill>
-            <a:srgbClr val="1E2A44"/>
+            <a:srgbClr val="FFFFFF"/>
           </a:solidFill>
-          <a:ln w="12700">
+          <a:ln w="19050">
             <a:solidFill>
-              <a:srgbClr val="FB7185"/>
+              <a:srgbClr val="E11D48"/>
             </a:solidFill>
             <a:prstDash val="solid"/>
           </a:ln>
@@ -3196,7 +3196,7 @@
             <a:r>
               <a:rPr lang="en-US" sz="1400" b="1" dirty="0">
                 <a:solidFill>
-                  <a:srgbClr val="FB7185"/>
+                  <a:srgbClr val="BE123C"/>
                 </a:solidFill>
                 <a:latin typeface="Consolas" pitchFamily="34" charset="0"/>
                 <a:ea typeface="Consolas" pitchFamily="34" charset="-122"/>
@@ -3235,7 +3235,7 @@
             <a:r>
               <a:rPr lang="en-US" sz="1650" dirty="0">
                 <a:solidFill>
-                  <a:srgbClr val="E8EDF5"/>
+                  <a:srgbClr val="14181F"/>
                 </a:solidFill>
                 <a:latin typeface="Calibri" pitchFamily="34" charset="0"/>
                 <a:ea typeface="Calibri" pitchFamily="34" charset="-122"/>
@@ -3262,11 +3262,11 @@
             <a:avLst/>
           </a:prstGeom>
           <a:solidFill>
-            <a:srgbClr val="1E2A44"/>
+            <a:srgbClr val="FFFFFF"/>
           </a:solidFill>
-          <a:ln w="12700">
+          <a:ln w="19050">
             <a:solidFill>
-              <a:srgbClr val="FB7185"/>
+              <a:srgbClr val="E11D48"/>
             </a:solidFill>
             <a:prstDash val="solid"/>
           </a:ln>
@@ -3299,7 +3299,7 @@
             <a:r>
               <a:rPr lang="en-US" sz="1400" b="1" dirty="0">
                 <a:solidFill>
-                  <a:srgbClr val="FB7185"/>
+                  <a:srgbClr val="BE123C"/>
                 </a:solidFill>
                 <a:latin typeface="Consolas" pitchFamily="34" charset="0"/>
                 <a:ea typeface="Consolas" pitchFamily="34" charset="-122"/>
@@ -3338,7 +3338,7 @@
             <a:r>
               <a:rPr lang="en-US" sz="1650" dirty="0">
                 <a:solidFill>
-                  <a:srgbClr val="E8EDF5"/>
+                  <a:srgbClr val="14181F"/>
                 </a:solidFill>
                 <a:latin typeface="Calibri" pitchFamily="34" charset="0"/>
                 <a:ea typeface="Calibri" pitchFamily="34" charset="-122"/>
@@ -3365,11 +3365,11 @@
             <a:avLst/>
           </a:prstGeom>
           <a:solidFill>
-            <a:srgbClr val="1E2A44"/>
+            <a:srgbClr val="FFFFFF"/>
           </a:solidFill>
-          <a:ln w="12700">
+          <a:ln w="19050">
             <a:solidFill>
-              <a:srgbClr val="FB7185"/>
+              <a:srgbClr val="E11D48"/>
             </a:solidFill>
             <a:prstDash val="solid"/>
           </a:ln>
@@ -3402,7 +3402,7 @@
             <a:r>
               <a:rPr lang="en-US" sz="1400" b="1" dirty="0">
                 <a:solidFill>
-                  <a:srgbClr val="FB7185"/>
+                  <a:srgbClr val="BE123C"/>
                 </a:solidFill>
                 <a:latin typeface="Consolas" pitchFamily="34" charset="0"/>
                 <a:ea typeface="Consolas" pitchFamily="34" charset="-122"/>
@@ -3441,7 +3441,7 @@
             <a:r>
               <a:rPr lang="en-US" sz="1650" dirty="0">
                 <a:solidFill>
-                  <a:srgbClr val="E8EDF5"/>
+                  <a:srgbClr val="14181F"/>
                 </a:solidFill>
                 <a:latin typeface="Calibri" pitchFamily="34" charset="0"/>
                 <a:ea typeface="Calibri" pitchFamily="34" charset="-122"/>
@@ -3467,7 +3467,7 @@
     <p:bg>
       <p:bgPr>
         <a:solidFill>
-          <a:srgbClr val="0A0F1C"/>
+          <a:srgbClr val="F7F6F2"/>
         </a:solidFill>
       </p:bgPr>
     </p:bg>
@@ -3532,7 +3532,7 @@
             <a:r>
               <a:rPr lang="en-US" sz="3400" b="1" dirty="0">
                 <a:solidFill>
-                  <a:srgbClr val="E8EDF5"/>
+                  <a:srgbClr val="14181F"/>
                 </a:solidFill>
                 <a:latin typeface="Trebuchet MS" pitchFamily="34" charset="0"/>
                 <a:ea typeface="Trebuchet MS" pitchFamily="34" charset="-122"/>
@@ -3561,11 +3561,11 @@
             </a:avLst>
           </a:prstGeom>
           <a:solidFill>
-            <a:srgbClr val="0D1424"/>
+            <a:srgbClr val="12161F"/>
           </a:solidFill>
           <a:ln w="12700">
             <a:solidFill>
-              <a:srgbClr val="2A3852"/>
+              <a:srgbClr val="12161F"/>
             </a:solidFill>
             <a:prstDash val="solid"/>
           </a:ln>
@@ -3601,7 +3601,7 @@
             <a:r>
               <a:rPr lang="en-US" sz="1500" dirty="0">
                 <a:solidFill>
-                  <a:srgbClr val="34D399"/>
+                  <a:srgbClr val="6EE7B7"/>
                 </a:solidFill>
                 <a:latin typeface="Consolas" pitchFamily="34" charset="0"/>
                 <a:ea typeface="Consolas" pitchFamily="34" charset="-122"/>
@@ -3621,7 +3621,7 @@
             <a:r>
               <a:rPr lang="en-US" sz="1500" dirty="0">
                 <a:solidFill>
-                  <a:srgbClr val="34D399"/>
+                  <a:srgbClr val="6EE7B7"/>
                 </a:solidFill>
                 <a:latin typeface="Consolas" pitchFamily="34" charset="0"/>
                 <a:ea typeface="Consolas" pitchFamily="34" charset="-122"/>
@@ -3641,7 +3641,7 @@
             <a:r>
               <a:rPr lang="en-US" sz="1500" dirty="0">
                 <a:solidFill>
-                  <a:srgbClr val="34D399"/>
+                  <a:srgbClr val="6EE7B7"/>
                 </a:solidFill>
                 <a:latin typeface="Consolas" pitchFamily="34" charset="0"/>
                 <a:ea typeface="Consolas" pitchFamily="34" charset="-122"/>
@@ -3661,7 +3661,7 @@
             <a:r>
               <a:rPr lang="en-US" sz="1500" dirty="0">
                 <a:solidFill>
-                  <a:srgbClr val="34D399"/>
+                  <a:srgbClr val="6EE7B7"/>
                 </a:solidFill>
                 <a:latin typeface="Consolas" pitchFamily="34" charset="0"/>
                 <a:ea typeface="Consolas" pitchFamily="34" charset="-122"/>
@@ -3681,7 +3681,7 @@
             <a:r>
               <a:rPr lang="en-US" sz="1500" dirty="0">
                 <a:solidFill>
-                  <a:srgbClr val="34D399"/>
+                  <a:srgbClr val="6EE7B7"/>
                 </a:solidFill>
                 <a:latin typeface="Consolas" pitchFamily="34" charset="0"/>
                 <a:ea typeface="Consolas" pitchFamily="34" charset="-122"/>
@@ -3720,7 +3720,7 @@
             <a:r>
               <a:rPr lang="en-US" sz="1700" dirty="0">
                 <a:solidFill>
-                  <a:srgbClr val="E8EDF5"/>
+                  <a:srgbClr val="14181F"/>
                 </a:solidFill>
                 <a:latin typeface="Calibri" pitchFamily="34" charset="0"/>
                 <a:ea typeface="Calibri" pitchFamily="34" charset="-122"/>
@@ -3759,7 +3759,7 @@
             <a:r>
               <a:rPr lang="en-US" sz="1500" dirty="0">
                 <a:solidFill>
-                  <a:srgbClr val="94A3B8"/>
+                  <a:srgbClr val="525A66"/>
                 </a:solidFill>
                 <a:latin typeface="Calibri" pitchFamily="34" charset="0"/>
                 <a:ea typeface="Calibri" pitchFamily="34" charset="-122"/>
@@ -3798,7 +3798,7 @@
             <a:r>
               <a:rPr lang="en-US" sz="1050" b="1" spc="120" kern="0" dirty="0">
                 <a:solidFill>
-                  <a:srgbClr val="64748B"/>
+                  <a:srgbClr val="5E6673"/>
                 </a:solidFill>
                 <a:latin typeface="Consolas" pitchFamily="34" charset="0"/>
                 <a:ea typeface="Consolas" pitchFamily="34" charset="-122"/>
@@ -3824,7 +3824,7 @@
     <p:bg>
       <p:bgPr>
         <a:solidFill>
-          <a:srgbClr val="0A0F1C"/>
+          <a:srgbClr val="F7F6F2"/>
         </a:solidFill>
       </p:bgPr>
     </p:bg>
@@ -3889,7 +3889,7 @@
             <a:r>
               <a:rPr lang="en-US" sz="3400" b="1" dirty="0">
                 <a:solidFill>
-                  <a:srgbClr val="E8EDF5"/>
+                  <a:srgbClr val="14181F"/>
                 </a:solidFill>
                 <a:latin typeface="Trebuchet MS" pitchFamily="34" charset="0"/>
                 <a:ea typeface="Trebuchet MS" pitchFamily="34" charset="-122"/>
@@ -3918,11 +3918,11 @@
             </a:avLst>
           </a:prstGeom>
           <a:solidFill>
-            <a:srgbClr val="151E33"/>
+            <a:srgbClr val="FFFFFF"/>
           </a:solidFill>
           <a:ln w="12700">
             <a:solidFill>
-              <a:srgbClr val="2A3852"/>
+              <a:srgbClr val="DCD9D0"/>
             </a:solidFill>
             <a:prstDash val="solid"/>
           </a:ln>
@@ -3955,7 +3955,7 @@
             <a:r>
               <a:rPr lang="en-US" sz="1500" b="1" spc="150" kern="0" dirty="0">
                 <a:solidFill>
-                  <a:srgbClr val="94A3B8"/>
+                  <a:srgbClr val="525A66"/>
                 </a:solidFill>
                 <a:latin typeface="Consolas" pitchFamily="34" charset="0"/>
                 <a:ea typeface="Consolas" pitchFamily="34" charset="-122"/>
@@ -3997,7 +3997,7 @@
             <a:r>
               <a:rPr lang="en-US" sz="1500" dirty="0">
                 <a:solidFill>
-                  <a:srgbClr val="E8EDF5"/>
+                  <a:srgbClr val="14181F"/>
                 </a:solidFill>
                 <a:latin typeface="Calibri" pitchFamily="34" charset="0"/>
                 <a:ea typeface="Calibri" pitchFamily="34" charset="-122"/>
@@ -4026,11 +4026,11 @@
             </a:avLst>
           </a:prstGeom>
           <a:solidFill>
-            <a:srgbClr val="151E33"/>
+            <a:srgbClr val="FFFFFF"/>
           </a:solidFill>
           <a:ln w="12700">
             <a:solidFill>
-              <a:srgbClr val="2A3852"/>
+              <a:srgbClr val="DCD9D0"/>
             </a:solidFill>
             <a:prstDash val="solid"/>
           </a:ln>
@@ -4063,7 +4063,7 @@
             <a:r>
               <a:rPr lang="en-US" sz="1500" b="1" spc="150" kern="0" dirty="0">
                 <a:solidFill>
-                  <a:srgbClr val="FB7185"/>
+                  <a:srgbClr val="BE123C"/>
                 </a:solidFill>
                 <a:latin typeface="Consolas" pitchFamily="34" charset="0"/>
                 <a:ea typeface="Consolas" pitchFamily="34" charset="-122"/>
@@ -4105,7 +4105,7 @@
             <a:r>
               <a:rPr lang="en-US" sz="1500" dirty="0">
                 <a:solidFill>
-                  <a:srgbClr val="E8EDF5"/>
+                  <a:srgbClr val="14181F"/>
                 </a:solidFill>
                 <a:latin typeface="Calibri" pitchFamily="34" charset="0"/>
                 <a:ea typeface="Calibri" pitchFamily="34" charset="-122"/>
@@ -4134,7 +4134,7 @@
             </a:avLst>
           </a:prstGeom>
           <a:solidFill>
-            <a:srgbClr val="1E2A44"/>
+            <a:srgbClr val="FDF3E3"/>
           </a:solidFill>
           <a:ln w="12700">
             <a:solidFill>
@@ -4171,7 +4171,7 @@
             <a:r>
               <a:rPr lang="en-US" sz="1500" b="1" spc="150" kern="0" dirty="0">
                 <a:solidFill>
-                  <a:srgbClr val="F5A524"/>
+                  <a:srgbClr val="B45309"/>
                 </a:solidFill>
                 <a:latin typeface="Consolas" pitchFamily="34" charset="0"/>
                 <a:ea typeface="Consolas" pitchFamily="34" charset="-122"/>
@@ -4213,7 +4213,7 @@
             <a:r>
               <a:rPr lang="en-US" sz="1500" dirty="0">
                 <a:solidFill>
-                  <a:srgbClr val="E8EDF5"/>
+                  <a:srgbClr val="14181F"/>
                 </a:solidFill>
                 <a:latin typeface="Calibri" pitchFamily="34" charset="0"/>
                 <a:ea typeface="Calibri" pitchFamily="34" charset="-122"/>
@@ -4252,7 +4252,7 @@
             <a:r>
               <a:rPr lang="en-US" sz="1600" i="1" dirty="0">
                 <a:solidFill>
-                  <a:srgbClr val="F5A524"/>
+                  <a:srgbClr val="B45309"/>
                 </a:solidFill>
                 <a:latin typeface="Calibri" pitchFamily="34" charset="0"/>
                 <a:ea typeface="Calibri" pitchFamily="34" charset="-122"/>
@@ -4291,7 +4291,7 @@
             <a:r>
               <a:rPr lang="en-US" sz="1700" dirty="0">
                 <a:solidFill>
-                  <a:srgbClr val="E8EDF5"/>
+                  <a:srgbClr val="14181F"/>
                 </a:solidFill>
                 <a:latin typeface="Calibri" pitchFamily="34" charset="0"/>
                 <a:ea typeface="Calibri" pitchFamily="34" charset="-122"/>
@@ -4330,7 +4330,7 @@
             <a:r>
               <a:rPr lang="en-US" sz="1400" dirty="0">
                 <a:solidFill>
-                  <a:srgbClr val="94A3B8"/>
+                  <a:srgbClr val="525A66"/>
                 </a:solidFill>
                 <a:latin typeface="Calibri" pitchFamily="34" charset="0"/>
                 <a:ea typeface="Calibri" pitchFamily="34" charset="-122"/>
@@ -4356,7 +4356,7 @@
     <p:bg>
       <p:bgPr>
         <a:solidFill>
-          <a:srgbClr val="0A0F1C"/>
+          <a:srgbClr val="F7F6F2"/>
         </a:solidFill>
       </p:bgPr>
     </p:bg>
@@ -4421,7 +4421,7 @@
             <a:r>
               <a:rPr lang="en-US" sz="3400" b="1" dirty="0">
                 <a:solidFill>
-                  <a:srgbClr val="E8EDF5"/>
+                  <a:srgbClr val="14181F"/>
                 </a:solidFill>
                 <a:latin typeface="Trebuchet MS" pitchFamily="34" charset="0"/>
                 <a:ea typeface="Trebuchet MS" pitchFamily="34" charset="-122"/>
@@ -4450,11 +4450,11 @@
             </a:avLst>
           </a:prstGeom>
           <a:solidFill>
-            <a:srgbClr val="1E2A44"/>
+            <a:srgbClr val="FFFFFF"/>
           </a:solidFill>
           <a:ln w="12700">
             <a:solidFill>
-              <a:srgbClr val="34D399"/>
+              <a:srgbClr val="047857"/>
             </a:solidFill>
             <a:prstDash val="solid"/>
           </a:ln>
@@ -4487,7 +4487,7 @@
             <a:r>
               <a:rPr lang="en-US" sz="5200" b="1" dirty="0">
                 <a:solidFill>
-                  <a:srgbClr val="34D399"/>
+                  <a:srgbClr val="047857"/>
                 </a:solidFill>
                 <a:latin typeface="Trebuchet MS" pitchFamily="34" charset="0"/>
                 <a:ea typeface="Trebuchet MS" pitchFamily="34" charset="-122"/>
@@ -4526,7 +4526,7 @@
             <a:r>
               <a:rPr lang="en-US" sz="1500" dirty="0">
                 <a:solidFill>
-                  <a:srgbClr val="E8EDF5"/>
+                  <a:srgbClr val="14181F"/>
                 </a:solidFill>
                 <a:latin typeface="Calibri" pitchFamily="34" charset="0"/>
                 <a:ea typeface="Calibri" pitchFamily="34" charset="-122"/>
@@ -4565,7 +4565,7 @@
             <a:r>
               <a:rPr lang="en-US" sz="1100" dirty="0">
                 <a:solidFill>
-                  <a:srgbClr val="94A3B8"/>
+                  <a:srgbClr val="525A66"/>
                 </a:solidFill>
                 <a:latin typeface="Consolas" pitchFamily="34" charset="0"/>
                 <a:ea typeface="Consolas" pitchFamily="34" charset="-122"/>
@@ -4594,11 +4594,11 @@
             </a:avLst>
           </a:prstGeom>
           <a:solidFill>
-            <a:srgbClr val="1E2A44"/>
+            <a:srgbClr val="FFFFFF"/>
           </a:solidFill>
           <a:ln w="12700">
             <a:solidFill>
-              <a:srgbClr val="34D399"/>
+              <a:srgbClr val="047857"/>
             </a:solidFill>
             <a:prstDash val="solid"/>
           </a:ln>
@@ -4631,7 +4631,7 @@
             <a:r>
               <a:rPr lang="en-US" sz="5200" b="1" dirty="0">
                 <a:solidFill>
-                  <a:srgbClr val="34D399"/>
+                  <a:srgbClr val="047857"/>
                 </a:solidFill>
                 <a:latin typeface="Trebuchet MS" pitchFamily="34" charset="0"/>
                 <a:ea typeface="Trebuchet MS" pitchFamily="34" charset="-122"/>
@@ -4670,7 +4670,7 @@
             <a:r>
               <a:rPr lang="en-US" sz="1500" dirty="0">
                 <a:solidFill>
-                  <a:srgbClr val="E8EDF5"/>
+                  <a:srgbClr val="14181F"/>
                 </a:solidFill>
                 <a:latin typeface="Calibri" pitchFamily="34" charset="0"/>
                 <a:ea typeface="Calibri" pitchFamily="34" charset="-122"/>
@@ -4709,7 +4709,7 @@
             <a:r>
               <a:rPr lang="en-US" sz="1100" dirty="0">
                 <a:solidFill>
-                  <a:srgbClr val="94A3B8"/>
+                  <a:srgbClr val="525A66"/>
                 </a:solidFill>
                 <a:latin typeface="Consolas" pitchFamily="34" charset="0"/>
                 <a:ea typeface="Consolas" pitchFamily="34" charset="-122"/>
@@ -4738,11 +4738,11 @@
             </a:avLst>
           </a:prstGeom>
           <a:solidFill>
-            <a:srgbClr val="151E33"/>
+            <a:srgbClr val="FFFFFF"/>
           </a:solidFill>
           <a:ln w="12700">
             <a:solidFill>
-              <a:srgbClr val="2A3852"/>
+              <a:srgbClr val="DCD9D0"/>
             </a:solidFill>
             <a:prstDash val="solid"/>
           </a:ln>
@@ -4775,7 +4775,7 @@
             <a:r>
               <a:rPr lang="en-US" sz="1500" dirty="0">
                 <a:solidFill>
-                  <a:srgbClr val="E8EDF5"/>
+                  <a:srgbClr val="14181F"/>
                 </a:solidFill>
                 <a:latin typeface="Calibri" pitchFamily="34" charset="0"/>
                 <a:ea typeface="Calibri" pitchFamily="34" charset="-122"/>
@@ -4814,7 +4814,7 @@
             <a:r>
               <a:rPr lang="en-US" sz="1300" i="1" dirty="0">
                 <a:solidFill>
-                  <a:srgbClr val="64748B"/>
+                  <a:srgbClr val="5E6673"/>
                 </a:solidFill>
                 <a:latin typeface="Calibri" pitchFamily="34" charset="0"/>
                 <a:ea typeface="Calibri" pitchFamily="34" charset="-122"/>
@@ -4840,7 +4840,7 @@
     <p:bg>
       <p:bgPr>
         <a:solidFill>
-          <a:srgbClr val="0A0F1C"/>
+          <a:srgbClr val="F7F6F2"/>
         </a:solidFill>
       </p:bgPr>
     </p:bg>
@@ -4905,7 +4905,7 @@
             <a:r>
               <a:rPr lang="en-US" sz="3400" b="1" dirty="0">
                 <a:solidFill>
-                  <a:srgbClr val="E8EDF5"/>
+                  <a:srgbClr val="14181F"/>
                 </a:solidFill>
                 <a:latin typeface="Trebuchet MS" pitchFamily="34" charset="0"/>
                 <a:ea typeface="Trebuchet MS" pitchFamily="34" charset="-122"/>
@@ -4934,11 +4934,11 @@
             </a:avLst>
           </a:prstGeom>
           <a:solidFill>
-            <a:srgbClr val="1E2A44"/>
+            <a:srgbClr val="FDF2F4"/>
           </a:solidFill>
           <a:ln w="12700">
             <a:solidFill>
-              <a:srgbClr val="FB7185"/>
+              <a:srgbClr val="E11D48"/>
             </a:solidFill>
             <a:prstDash val="solid"/>
           </a:ln>
@@ -4971,7 +4971,7 @@
             <a:r>
               <a:rPr lang="en-US" sz="2100" b="1" dirty="0">
                 <a:solidFill>
-                  <a:srgbClr val="E8EDF5"/>
+                  <a:srgbClr val="14181F"/>
                 </a:solidFill>
                 <a:latin typeface="Trebuchet MS" pitchFamily="34" charset="0"/>
                 <a:ea typeface="Trebuchet MS" pitchFamily="34" charset="-122"/>
@@ -5000,11 +5000,11 @@
             </a:avLst>
           </a:prstGeom>
           <a:solidFill>
-            <a:srgbClr val="151E33"/>
+            <a:srgbClr val="FFFFFF"/>
           </a:solidFill>
           <a:ln w="12700">
             <a:solidFill>
-              <a:srgbClr val="2A3852"/>
+              <a:srgbClr val="DCD9D0"/>
             </a:solidFill>
             <a:prstDash val="solid"/>
           </a:ln>
@@ -5037,7 +5037,7 @@
             <a:r>
               <a:rPr lang="en-US" sz="1050" b="1" spc="120" kern="0" dirty="0">
                 <a:solidFill>
-                  <a:srgbClr val="34D399"/>
+                  <a:srgbClr val="047857"/>
                 </a:solidFill>
                 <a:latin typeface="Consolas" pitchFamily="34" charset="0"/>
                 <a:ea typeface="Consolas" pitchFamily="34" charset="-122"/>
@@ -5076,7 +5076,7 @@
             <a:r>
               <a:rPr lang="en-US" sz="1400" dirty="0">
                 <a:solidFill>
-                  <a:srgbClr val="E8EDF5"/>
+                  <a:srgbClr val="14181F"/>
                 </a:solidFill>
                 <a:latin typeface="Consolas" pitchFamily="34" charset="0"/>
                 <a:ea typeface="Consolas" pitchFamily="34" charset="-122"/>
@@ -5118,7 +5118,7 @@
             <a:r>
               <a:rPr lang="en-US" sz="1400" dirty="0">
                 <a:solidFill>
-                  <a:srgbClr val="94A3B8"/>
+                  <a:srgbClr val="525A66"/>
                 </a:solidFill>
                 <a:latin typeface="Calibri" pitchFamily="34" charset="0"/>
                 <a:ea typeface="Calibri" pitchFamily="34" charset="-122"/>
@@ -5147,11 +5147,11 @@
             </a:avLst>
           </a:prstGeom>
           <a:solidFill>
-            <a:srgbClr val="151E33"/>
+            <a:srgbClr val="FFFFFF"/>
           </a:solidFill>
           <a:ln w="12700">
             <a:solidFill>
-              <a:srgbClr val="2A3852"/>
+              <a:srgbClr val="DCD9D0"/>
             </a:solidFill>
             <a:prstDash val="solid"/>
           </a:ln>
@@ -5184,7 +5184,7 @@
             <a:r>
               <a:rPr lang="en-US" sz="1050" b="1" spc="120" kern="0" dirty="0">
                 <a:solidFill>
-                  <a:srgbClr val="9BA8F5"/>
+                  <a:srgbClr val="4338CA"/>
                 </a:solidFill>
                 <a:latin typeface="Consolas" pitchFamily="34" charset="0"/>
                 <a:ea typeface="Consolas" pitchFamily="34" charset="-122"/>
@@ -5223,7 +5223,7 @@
             <a:r>
               <a:rPr lang="en-US" sz="1400" dirty="0">
                 <a:solidFill>
-                  <a:srgbClr val="E8EDF5"/>
+                  <a:srgbClr val="14181F"/>
                 </a:solidFill>
                 <a:latin typeface="Consolas" pitchFamily="34" charset="0"/>
                 <a:ea typeface="Consolas" pitchFamily="34" charset="-122"/>
@@ -5265,7 +5265,7 @@
             <a:r>
               <a:rPr lang="en-US" sz="1400" dirty="0">
                 <a:solidFill>
-                  <a:srgbClr val="94A3B8"/>
+                  <a:srgbClr val="525A66"/>
                 </a:solidFill>
                 <a:latin typeface="Calibri" pitchFamily="34" charset="0"/>
                 <a:ea typeface="Calibri" pitchFamily="34" charset="-122"/>
@@ -5304,7 +5304,7 @@
             <a:r>
               <a:rPr lang="en-US" sz="1450" i="1" dirty="0">
                 <a:solidFill>
-                  <a:srgbClr val="F5A524"/>
+                  <a:srgbClr val="B45309"/>
                 </a:solidFill>
                 <a:latin typeface="Calibri" pitchFamily="34" charset="0"/>
                 <a:ea typeface="Calibri" pitchFamily="34" charset="-122"/>
@@ -5330,7 +5330,7 @@
     <p:bg>
       <p:bgPr>
         <a:solidFill>
-          <a:srgbClr val="0A0F1C"/>
+          <a:srgbClr val="F7F6F2"/>
         </a:solidFill>
       </p:bgPr>
     </p:bg>
@@ -5395,7 +5395,7 @@
             <a:r>
               <a:rPr lang="en-US" sz="3400" b="1" dirty="0">
                 <a:solidFill>
-                  <a:srgbClr val="E8EDF5"/>
+                  <a:srgbClr val="14181F"/>
                 </a:solidFill>
                 <a:latin typeface="Trebuchet MS" pitchFamily="34" charset="0"/>
                 <a:ea typeface="Trebuchet MS" pitchFamily="34" charset="-122"/>
@@ -5424,11 +5424,11 @@
             </a:avLst>
           </a:prstGeom>
           <a:solidFill>
-            <a:srgbClr val="151E33"/>
+            <a:srgbClr val="FFFFFF"/>
           </a:solidFill>
           <a:ln w="12700">
             <a:solidFill>
-              <a:srgbClr val="34D399"/>
+              <a:srgbClr val="047857"/>
             </a:solidFill>
             <a:prstDash val="solid"/>
           </a:ln>
@@ -5461,7 +5461,7 @@
             <a:r>
               <a:rPr lang="en-US" sz="4400" b="1" dirty="0">
                 <a:solidFill>
-                  <a:srgbClr val="34D399"/>
+                  <a:srgbClr val="047857"/>
                 </a:solidFill>
                 <a:latin typeface="Trebuchet MS" pitchFamily="34" charset="0"/>
                 <a:ea typeface="Trebuchet MS" pitchFamily="34" charset="-122"/>
@@ -5503,7 +5503,7 @@
             <a:r>
               <a:rPr lang="en-US" sz="1450" dirty="0">
                 <a:solidFill>
-                  <a:srgbClr val="E8EDF5"/>
+                  <a:srgbClr val="14181F"/>
                 </a:solidFill>
                 <a:latin typeface="Calibri" pitchFamily="34" charset="0"/>
                 <a:ea typeface="Calibri" pitchFamily="34" charset="-122"/>
@@ -5545,7 +5545,7 @@
             <a:r>
               <a:rPr lang="en-US" sz="1100" dirty="0">
                 <a:solidFill>
-                  <a:srgbClr val="64748B"/>
+                  <a:srgbClr val="5E6673"/>
                 </a:solidFill>
                 <a:latin typeface="Calibri" pitchFamily="34" charset="0"/>
                 <a:ea typeface="Calibri" pitchFamily="34" charset="-122"/>
@@ -5574,11 +5574,11 @@
             </a:avLst>
           </a:prstGeom>
           <a:solidFill>
-            <a:srgbClr val="151E33"/>
+            <a:srgbClr val="FFFFFF"/>
           </a:solidFill>
           <a:ln w="12700">
             <a:solidFill>
-              <a:srgbClr val="2A3852"/>
+              <a:srgbClr val="DCD9D0"/>
             </a:solidFill>
             <a:prstDash val="solid"/>
           </a:ln>
@@ -5611,7 +5611,7 @@
             <a:r>
               <a:rPr lang="en-US" sz="4400" b="1" dirty="0">
                 <a:solidFill>
-                  <a:srgbClr val="E8EDF5"/>
+                  <a:srgbClr val="14181F"/>
                 </a:solidFill>
                 <a:latin typeface="Trebuchet MS" pitchFamily="34" charset="0"/>
                 <a:ea typeface="Trebuchet MS" pitchFamily="34" charset="-122"/>
@@ -5653,7 +5653,7 @@
             <a:r>
               <a:rPr lang="en-US" sz="1450" dirty="0">
                 <a:solidFill>
-                  <a:srgbClr val="E8EDF5"/>
+                  <a:srgbClr val="14181F"/>
                 </a:solidFill>
                 <a:latin typeface="Calibri" pitchFamily="34" charset="0"/>
                 <a:ea typeface="Calibri" pitchFamily="34" charset="-122"/>
@@ -5695,7 +5695,7 @@
             <a:r>
               <a:rPr lang="en-US" sz="1100" dirty="0">
                 <a:solidFill>
-                  <a:srgbClr val="64748B"/>
+                  <a:srgbClr val="5E6673"/>
                 </a:solidFill>
                 <a:latin typeface="Calibri" pitchFamily="34" charset="0"/>
                 <a:ea typeface="Calibri" pitchFamily="34" charset="-122"/>
@@ -5724,11 +5724,11 @@
             </a:avLst>
           </a:prstGeom>
           <a:solidFill>
-            <a:srgbClr val="151E33"/>
+            <a:srgbClr val="FFFFFF"/>
           </a:solidFill>
           <a:ln w="12700">
             <a:solidFill>
-              <a:srgbClr val="2A3852"/>
+              <a:srgbClr val="DCD9D0"/>
             </a:solidFill>
             <a:prstDash val="solid"/>
           </a:ln>
@@ -5761,7 +5761,7 @@
             <a:r>
               <a:rPr lang="en-US" sz="4400" b="1" dirty="0">
                 <a:solidFill>
-                  <a:srgbClr val="E8EDF5"/>
+                  <a:srgbClr val="14181F"/>
                 </a:solidFill>
                 <a:latin typeface="Trebuchet MS" pitchFamily="34" charset="0"/>
                 <a:ea typeface="Trebuchet MS" pitchFamily="34" charset="-122"/>
@@ -5803,7 +5803,7 @@
             <a:r>
               <a:rPr lang="en-US" sz="1450" dirty="0">
                 <a:solidFill>
-                  <a:srgbClr val="E8EDF5"/>
+                  <a:srgbClr val="14181F"/>
                 </a:solidFill>
                 <a:latin typeface="Calibri" pitchFamily="34" charset="0"/>
                 <a:ea typeface="Calibri" pitchFamily="34" charset="-122"/>
@@ -5845,7 +5845,7 @@
             <a:r>
               <a:rPr lang="en-US" sz="1100" dirty="0">
                 <a:solidFill>
-                  <a:srgbClr val="64748B"/>
+                  <a:srgbClr val="5E6673"/>
                 </a:solidFill>
                 <a:latin typeface="Calibri" pitchFamily="34" charset="0"/>
                 <a:ea typeface="Calibri" pitchFamily="34" charset="-122"/>
@@ -5874,11 +5874,11 @@
             </a:avLst>
           </a:prstGeom>
           <a:solidFill>
-            <a:srgbClr val="151E33"/>
+            <a:srgbClr val="FFFFFF"/>
           </a:solidFill>
           <a:ln w="12700">
             <a:solidFill>
-              <a:srgbClr val="2A3852"/>
+              <a:srgbClr val="DCD9D0"/>
             </a:solidFill>
             <a:prstDash val="solid"/>
           </a:ln>
@@ -5911,7 +5911,7 @@
             <a:r>
               <a:rPr lang="en-US" sz="4400" b="1" dirty="0">
                 <a:solidFill>
-                  <a:srgbClr val="F5A524"/>
+                  <a:srgbClr val="B45309"/>
                 </a:solidFill>
                 <a:latin typeface="Trebuchet MS" pitchFamily="34" charset="0"/>
                 <a:ea typeface="Trebuchet MS" pitchFamily="34" charset="-122"/>
@@ -5953,7 +5953,7 @@
             <a:r>
               <a:rPr lang="en-US" sz="1450" dirty="0">
                 <a:solidFill>
-                  <a:srgbClr val="E8EDF5"/>
+                  <a:srgbClr val="14181F"/>
                 </a:solidFill>
                 <a:latin typeface="Calibri" pitchFamily="34" charset="0"/>
                 <a:ea typeface="Calibri" pitchFamily="34" charset="-122"/>
@@ -5995,7 +5995,7 @@
             <a:r>
               <a:rPr lang="en-US" sz="1100" dirty="0">
                 <a:solidFill>
-                  <a:srgbClr val="64748B"/>
+                  <a:srgbClr val="5E6673"/>
                 </a:solidFill>
                 <a:latin typeface="Calibri" pitchFamily="34" charset="0"/>
                 <a:ea typeface="Calibri" pitchFamily="34" charset="-122"/>
@@ -6034,7 +6034,7 @@
             <a:r>
               <a:rPr lang="en-US" sz="1500" dirty="0">
                 <a:solidFill>
-                  <a:srgbClr val="E8EDF5"/>
+                  <a:srgbClr val="14181F"/>
                 </a:solidFill>
                 <a:latin typeface="Calibri" pitchFamily="34" charset="0"/>
                 <a:ea typeface="Calibri" pitchFamily="34" charset="-122"/>
@@ -6073,7 +6073,7 @@
             <a:r>
               <a:rPr lang="en-US" sz="1200" dirty="0">
                 <a:solidFill>
-                  <a:srgbClr val="F5A524"/>
+                  <a:srgbClr val="B45309"/>
                 </a:solidFill>
                 <a:latin typeface="Consolas" pitchFamily="34" charset="0"/>
                 <a:ea typeface="Consolas" pitchFamily="34" charset="-122"/>
@@ -6112,7 +6112,7 @@
             <a:r>
               <a:rPr lang="en-US" sz="1300" i="1" dirty="0">
                 <a:solidFill>
-                  <a:srgbClr val="64748B"/>
+                  <a:srgbClr val="5E6673"/>
                 </a:solidFill>
                 <a:latin typeface="Calibri" pitchFamily="34" charset="0"/>
                 <a:ea typeface="Calibri" pitchFamily="34" charset="-122"/>

--- a/docs/nop-bai/CUSTOS-PITCH.pptx
+++ b/docs/nop-bai/CUSTOS-PITCH.pptx
@@ -5509,7 +5509,7 @@
                 <a:ea typeface="Calibri" pitchFamily="34" charset="-122"/>
                 <a:cs typeface="Calibri" pitchFamily="34" charset="-120"/>
               </a:rPr>
-              <a:t>cáo buộc sai</a:t>
+              <a:t>giao dịch bị gắn cờ</a:t>
             </a:r>
             <a:endParaRPr lang="en-US" sz="1450" dirty="0"/>
           </a:p>
@@ -5551,7 +5551,7 @@
                 <a:ea typeface="Calibri" pitchFamily="34" charset="-122"/>
                 <a:cs typeface="Calibri" pitchFamily="34" charset="-120"/>
               </a:rPr>
-              <a:t>trên 12 giao dịch mainnet ngẫu nhiên</a:t>
+              <a:t>trên 9 giao dịch SPL mainnet ngẫu nhiên · chưa kiểm chứng từng giao dịch là lành</a:t>
             </a:r>
             <a:endParaRPr lang="en-US" sz="1100" dirty="0"/>
           </a:p>
@@ -5617,7 +5617,7 @@
                 <a:ea typeface="Trebuchet MS" pitchFamily="34" charset="-122"/>
                 <a:cs typeface="Trebuchet MS" pitchFamily="34" charset="-120"/>
               </a:rPr>
-              <a:t>242</a:t>
+              <a:t>249</a:t>
             </a:r>
             <a:endParaRPr lang="en-US" sz="4400" dirty="0"/>
           </a:p>
@@ -5917,7 +5917,7 @@
                 <a:ea typeface="Trebuchet MS" pitchFamily="34" charset="-122"/>
                 <a:cs typeface="Trebuchet MS" pitchFamily="34" charset="-120"/>
               </a:rPr>
-              <a:t>77%</a:t>
+              <a:t>82%</a:t>
             </a:r>
             <a:endParaRPr lang="en-US" sz="4400" dirty="0"/>
           </a:p>

--- a/docs/nop-bai/CUSTOS-PITCH.pptx
+++ b/docs/nop-bai/CUSTOS-PITCH.pptx
@@ -2891,7 +2891,7 @@
                 <a:ea typeface="Trebuchet MS" pitchFamily="34" charset="-122"/>
                 <a:cs typeface="Trebuchet MS" pitchFamily="34" charset="-120"/>
               </a:rPr>
-              <a:t>và ví hiện tại im lặng về phần đó.</a:t>
+              <a:t>Custos nói ra phần đó — đó là chỗ khác biệt.</a:t>
             </a:r>
             <a:endParaRPr lang="en-US" sz="2300" dirty="0"/>
           </a:p>
@@ -2930,7 +2930,7 @@
                 <a:ea typeface="Calibri" pitchFamily="34" charset="-122"/>
                 <a:cs typeface="Calibri" pitchFamily="34" charset="-120"/>
               </a:rPr>
-              <a:t>Coinspect từng công bố một ca mô phỏng bỏ lọt lệnh đổi quyền sở hữu. Ví chỉ hiện vế hợp lệ.</a:t>
+              <a:t>Coinspect từng công bố một ca mô phỏng bỏ lọt lệnh đổi quyền sở hữu; lỗi đó đã được vá. Luận điểm ở đây là cấu trúc, không phải cáo buộc.</a:t>
             </a:r>
             <a:endParaRPr lang="en-US" sz="1350" dirty="0"/>
           </a:p>
@@ -4219,7 +4219,7 @@
                 <a:ea typeface="Calibri" pitchFamily="34" charset="-122"/>
                 <a:cs typeface="Calibri" pitchFamily="34" charset="-120"/>
               </a:rPr>
-              <a:t>Mọi ví và dApp khác không mua được năng lực này nữa</a:t>
+              <a:t>Dịch vụ bán rời của Blowfish đã dừng — thị trường có thật, có chỗ trống</a:t>
             </a:r>
             <a:endParaRPr lang="en-US" sz="1500" dirty="0"/>
           </a:p>
@@ -5617,7 +5617,7 @@
                 <a:ea typeface="Trebuchet MS" pitchFamily="34" charset="-122"/>
                 <a:cs typeface="Trebuchet MS" pitchFamily="34" charset="-120"/>
               </a:rPr>
-              <a:t>249</a:t>
+              <a:t>250</a:t>
             </a:r>
             <a:endParaRPr lang="en-US" sz="4400" dirty="0"/>
           </a:p>

--- a/docs/nop-bai/CUSTOS-PITCH.pptx
+++ b/docs/nop-bai/CUSTOS-PITCH.pptx
@@ -5617,7 +5617,7 @@
                 <a:ea typeface="Trebuchet MS" pitchFamily="34" charset="-122"/>
                 <a:cs typeface="Trebuchet MS" pitchFamily="34" charset="-120"/>
               </a:rPr>
-              <a:t>250</a:t>
+              <a:t>255</a:t>
             </a:r>
             <a:endParaRPr lang="en-US" sz="4400" dirty="0"/>
           </a:p>
@@ -5851,7 +5851,7 @@
                 <a:ea typeface="Calibri" pitchFamily="34" charset="-122"/>
                 <a:cs typeface="Calibri" pitchFamily="34" charset="-120"/>
               </a:rPr>
-              <a:t>29 mẫu kiểm thử</a:t>
+              <a:t>33 mẫu kiểm thử</a:t>
             </a:r>
             <a:endParaRPr lang="en-US" sz="1100" dirty="0"/>
           </a:p>

--- a/docs/nop-bai/CUSTOS-PITCH.pptx
+++ b/docs/nop-bai/CUSTOS-PITCH.pptx
@@ -5617,7 +5617,7 @@
                 <a:ea typeface="Trebuchet MS" pitchFamily="34" charset="-122"/>
                 <a:cs typeface="Trebuchet MS" pitchFamily="34" charset="-120"/>
               </a:rPr>
-              <a:t>255</a:t>
+              <a:t>256</a:t>
             </a:r>
             <a:endParaRPr lang="en-US" sz="4400" dirty="0"/>
           </a:p>

--- a/docs/nop-bai/CUSTOS-PITCH.pptx
+++ b/docs/nop-bai/CUSTOS-PITCH.pptx
@@ -5617,7 +5617,7 @@
                 <a:ea typeface="Trebuchet MS" pitchFamily="34" charset="-122"/>
                 <a:cs typeface="Trebuchet MS" pitchFamily="34" charset="-120"/>
               </a:rPr>
-              <a:t>256</a:t>
+              <a:t>263</a:t>
             </a:r>
             <a:endParaRPr lang="en-US" sz="4400" dirty="0"/>
           </a:p>

--- a/docs/nop-bai/CUSTOS-PITCH.pptx
+++ b/docs/nop-bai/CUSTOS-PITCH.pptx
@@ -5617,7 +5617,7 @@
                 <a:ea typeface="Trebuchet MS" pitchFamily="34" charset="-122"/>
                 <a:cs typeface="Trebuchet MS" pitchFamily="34" charset="-120"/>
               </a:rPr>
-              <a:t>263</a:t>
+              <a:t>267</a:t>
             </a:r>
             <a:endParaRPr lang="en-US" sz="4400" dirty="0"/>
           </a:p>

--- a/docs/nop-bai/CUSTOS-PITCH.pptx
+++ b/docs/nop-bai/CUSTOS-PITCH.pptx
@@ -5617,7 +5617,7 @@
                 <a:ea typeface="Trebuchet MS" pitchFamily="34" charset="-122"/>
                 <a:cs typeface="Trebuchet MS" pitchFamily="34" charset="-120"/>
               </a:rPr>
-              <a:t>267</a:t>
+              <a:t>272</a:t>
             </a:r>
             <a:endParaRPr lang="en-US" sz="4400" dirty="0"/>
           </a:p>

--- a/docs/nop-bai/CUSTOS-PITCH.pptx
+++ b/docs/nop-bai/CUSTOS-PITCH.pptx
@@ -5617,7 +5617,7 @@
                 <a:ea typeface="Trebuchet MS" pitchFamily="34" charset="-122"/>
                 <a:cs typeface="Trebuchet MS" pitchFamily="34" charset="-120"/>
               </a:rPr>
-              <a:t>272</a:t>
+              <a:t>282</a:t>
             </a:r>
             <a:endParaRPr lang="en-US" sz="4400" dirty="0"/>
           </a:p>

--- a/docs/nop-bai/CUSTOS-PITCH.pptx
+++ b/docs/nop-bai/CUSTOS-PITCH.pptx
@@ -5617,7 +5617,7 @@
                 <a:ea typeface="Trebuchet MS" pitchFamily="34" charset="-122"/>
                 <a:cs typeface="Trebuchet MS" pitchFamily="34" charset="-120"/>
               </a:rPr>
-              <a:t>282</a:t>
+              <a:t>283</a:t>
             </a:r>
             <a:endParaRPr lang="en-US" sz="4400" dirty="0"/>
           </a:p>

--- a/docs/nop-bai/CUSTOS-PITCH.pptx
+++ b/docs/nop-bai/CUSTOS-PITCH.pptx
@@ -1134,7 +1134,7 @@
           <a:p>
             <a:r>
               <a:rPr lang="en-US" dirty="0"/>
-              <a:t>2:50–3:10 — Con số 6,5 là TRUNG VỊ đo trên 20 giao dịch mainnet thật.
+              <a:t>2:50–3:10 — Con số 6,5 là TRUNG VỊ đo trên 20 giao dịch công khai ĐÃ LƯU OFFLINE — không phải runtime. [!] KHÔNG nói “mainnet” trên sân khấu: demo chạy hoàn toàn trên Devnet, và nhãn devnet-only nằm ngay trong README.
 [!] KHÔNG nói một tỉ lệ biên lợi nhuận cụ thể. Chưa tra bảng trọng số credit, chưa đo token, chưa có giá bán — ba ô trống thì không ra được tỉ lệ. Nói “biên gộp 90%” là bịa.
 [!] $49 là giá của NGƯỜI KHÁC, không phải giá của Custos.</a:t>
             </a:r>
@@ -4571,7 +4571,7 @@
                 <a:ea typeface="Consolas" pitchFamily="34" charset="-122"/>
                 <a:cs typeface="Consolas" pitchFamily="34" charset="-120"/>
               </a:rPr>
-              <a:t>thấp 4 · cao 9 · đo trên 20 giao dịch mainnet thật</a:t>
+              <a:t>thấp 4 · cao 9 · đo trên 20 giao dịch công khai đã lưu offline</a:t>
             </a:r>
             <a:endParaRPr lang="en-US" sz="1100" dirty="0"/>
           </a:p>
@@ -5509,7 +5509,7 @@
                 <a:ea typeface="Calibri" pitchFamily="34" charset="-122"/>
                 <a:cs typeface="Calibri" pitchFamily="34" charset="-120"/>
               </a:rPr>
-              <a:t>giao dịch bị gắn cờ</a:t>
+              <a:t>giao dịch bị CÁO BUỘC</a:t>
             </a:r>
             <a:endParaRPr lang="en-US" sz="1450" dirty="0"/>
           </a:p>
@@ -5551,7 +5551,7 @@
                 <a:ea typeface="Calibri" pitchFamily="34" charset="-122"/>
                 <a:cs typeface="Calibri" pitchFamily="34" charset="-120"/>
               </a:rPr>
-              <a:t>trên 9 giao dịch SPL mainnet ngẫu nhiên · chưa kiểm chứng từng giao dịch là lành</a:t>
+              <a:t>trên 9 giao dịch SPL công khai đã lưu offline · 7 ở mức Cần xem kỹ · cohort chưa gán nhãn ground truth</a:t>
             </a:r>
             <a:endParaRPr lang="en-US" sz="1100" dirty="0"/>
           </a:p>
@@ -5617,7 +5617,7 @@
                 <a:ea typeface="Trebuchet MS" pitchFamily="34" charset="-122"/>
                 <a:cs typeface="Trebuchet MS" pitchFamily="34" charset="-120"/>
               </a:rPr>
-              <a:t>283</a:t>
+              <a:t>285</a:t>
             </a:r>
             <a:endParaRPr lang="en-US" sz="4400" dirty="0"/>
           </a:p>

--- a/docs/nop-bai/CUSTOS-PITCH.pptx
+++ b/docs/nop-bai/CUSTOS-PITCH.pptx
@@ -5617,7 +5617,7 @@
                 <a:ea typeface="Trebuchet MS" pitchFamily="34" charset="-122"/>
                 <a:cs typeface="Trebuchet MS" pitchFamily="34" charset="-120"/>
               </a:rPr>
-              <a:t>285</a:t>
+              <a:t>292</a:t>
             </a:r>
             <a:endParaRPr lang="en-US" sz="4400" dirty="0"/>
           </a:p>

--- a/docs/nop-bai/CUSTOS-PITCH.pptx
+++ b/docs/nop-bai/CUSTOS-PITCH.pptx
@@ -1314,7 +1314,12 @@
             <a:r>
               <a:rPr lang="en-US" dirty="0"/>
               <a:t>3:30–3:55 — Đọc đúng số, không làm tròn lên.
-DÒNG CUỐI CÙNG LÀ DÒNG QUAN TRỌNG NHẤT SLIDE NÀY: tự nói ra chỗ còn thiếu (chưa phỏng vấn người dùng, chưa ví/dApp nào cam kết). Thừa nhận trước thì mất một chút; để giám khảo moi ra thì mất nhiều hơn.</a:t>
+DÒNG CUỐI CÙNG LÀ DÒNG QUAN TRỌNG NHẤT SLIDE NÀY: tự nói ra chỗ còn thiếu. Thừa nhận trước thì mất một chút; để giám khảo moi ra thì mất nhiều hơn.
+SỐ NGƯỜI DÙNG — nói kèm ĐÚNG ba mệnh đề này, đừng bỏ mệnh đề nào:
+  · 13/20 nêu được hậu quả. "Một phần" (5) KHÔNG gộp vào.
+  · 4/20 vẫn ký — nhưng 2 trong số đó HIỂU ĐÚNG và cố ý chấp nhận rủi ro trên ví phụ. Chỉ 2 người ký vì đọc nhầm.
+  · Đo ngày 29–30/08 trên bản giao diện LÚC ĐÓ; tấm cảnh báo đã được thiết kế lại sau đó. ĐỪNG nói "đo trên đúng màn hình các anh chị vừa xem".
+[!] Hỏi qua tin nhắn và video call, một người hỏi cả 20 — không có chấm chéo. Nói ra nếu bị hỏi về phương pháp.</a:t>
             </a:r>
             <a:endParaRPr lang="en-US" dirty="0"/>
           </a:p>
@@ -6118,7 +6123,7 @@
                 <a:ea typeface="Calibri" pitchFamily="34" charset="-122"/>
                 <a:cs typeface="Calibri" pitchFamily="34" charset="-120"/>
               </a:rPr>
-              <a:t>Chưa có: phỏng vấn người dùng, và chưa ví/dApp nào cam kết tích hợp. Chúng em nói thẳng chỗ còn thiếu.</a:t>
+              <a:t>Đã hỏi 20 người (29–30/08): 13/20 nêu được hậu quả · 4/20 vẫn ký. Chưa ví/dApp nào cam kết tích hợp.</a:t>
             </a:r>
             <a:endParaRPr lang="en-US" sz="1300" dirty="0"/>
           </a:p>

--- a/docs/nop-bai/CUSTOS-PITCH.pptx
+++ b/docs/nop-bai/CUSTOS-PITCH.pptx
@@ -5622,7 +5622,7 @@
                 <a:ea typeface="Trebuchet MS" pitchFamily="34" charset="-122"/>
                 <a:cs typeface="Trebuchet MS" pitchFamily="34" charset="-120"/>
               </a:rPr>
-              <a:t>292</a:t>
+              <a:t>294</a:t>
             </a:r>
             <a:endParaRPr lang="en-US" sz="4400" dirty="0"/>
           </a:p>

--- a/docs/nop-bai/CUSTOS-PITCH.pptx
+++ b/docs/nop-bai/CUSTOS-PITCH.pptx
@@ -1135,7 +1135,7 @@
             <a:r>
               <a:rPr lang="en-US" dirty="0"/>
               <a:t>2:50–3:10 — Con số 6,5 là TRUNG VỊ đo trên 20 giao dịch công khai ĐÃ LƯU OFFLINE — không phải runtime. [!] KHÔNG nói “mainnet” trên sân khấu: demo chạy hoàn toàn trên Devnet, và nhãn devnet-only nằm ngay trong README.
-[!] KHÔNG nói một tỉ lệ biên lợi nhuận cụ thể. Chưa tra bảng trọng số credit, chưa đo token, chưa có giá bán — ba ô trống thì không ra được tỉ lệ. Nói “biên gộp 90%” là bịa.
+[!] KHÔNG nói một tỉ lệ biên lợi nhuận cụ thể. Bảng credit ĐÃ tra (docs/DON-VI-KINH-TE.md — Helius, mọi phương thức Custos dùng đều 1 credit). Nhưng vẫn chưa đo token thật và chưa có giá bán của Custos — hai ô trống thì không ra được tỉ lệ. Nói “biên gộp 90%” là bịa.
 [!] $49 là giá của NGƯỜI KHÁC, không phải giá của Custos.</a:t>
             </a:r>
             <a:endParaRPr lang="en-US" dirty="0"/>
@@ -1318,7 +1318,7 @@
 SỐ NGƯỜI DÙNG — nói kèm ĐÚNG ba mệnh đề này, đừng bỏ mệnh đề nào:
   · 13/20 nêu được hậu quả. "Một phần" (5) KHÔNG gộp vào.
   · 4/20 vẫn ký — nhưng 2 trong số đó HIỂU ĐÚNG và cố ý chấp nhận rủi ro trên ví phụ. Chỉ 2 người ký vì đọc nhầm.
-  · Đo ngày 29–30/08 trên bản giao diện LÚC ĐÓ; tấm cảnh báo đã được thiết kế lại sau đó. ĐỪNG nói "đo trên đúng màn hình các anh chị vừa xem".
+  · Đo ngày 29/08 và 30/08/2026 trên bản giao diện LÚC ĐÓ; tấm cảnh báo đã được thiết kế lại sau đó. ĐỪNG nói "đo trên đúng màn hình các anh chị vừa xem".
 [!] Hỏi qua tin nhắn và video call, một người hỏi cả 20 — không có chấm chéo. Nói ra nếu bị hỏi về phương pháp.</a:t>
             </a:r>
             <a:endParaRPr lang="en-US" dirty="0"/>
@@ -5622,7 +5622,7 @@
                 <a:ea typeface="Trebuchet MS" pitchFamily="34" charset="-122"/>
                 <a:cs typeface="Trebuchet MS" pitchFamily="34" charset="-120"/>
               </a:rPr>
-              <a:t>294</a:t>
+              <a:t>339</a:t>
             </a:r>
             <a:endParaRPr lang="en-US" sz="4400" dirty="0"/>
           </a:p>
@@ -6123,7 +6123,7 @@
                 <a:ea typeface="Calibri" pitchFamily="34" charset="-122"/>
                 <a:cs typeface="Calibri" pitchFamily="34" charset="-120"/>
               </a:rPr>
-              <a:t>Đã hỏi 20 người (29–30/08): 13/20 nêu được hậu quả · 4/20 vẫn ký. Chưa ví/dApp nào cam kết tích hợp.</a:t>
+              <a:t>Đã hỏi 20 người (29/08 và 30/08/2026): 13/20 nêu được hậu quả · 4/20 vẫn ký. Chưa ví/dApp nào cam kết tích hợp.</a:t>
             </a:r>
             <a:endParaRPr lang="en-US" sz="1300" dirty="0"/>
           </a:p>

--- a/docs/nop-bai/CUSTOS-PITCH.pptx
+++ b/docs/nop-bai/CUSTOS-PITCH.pptx
@@ -5622,7 +5622,7 @@
                 <a:ea typeface="Trebuchet MS" pitchFamily="34" charset="-122"/>
                 <a:cs typeface="Trebuchet MS" pitchFamily="34" charset="-120"/>
               </a:rPr>
-              <a:t>339</a:t>
+              <a:t>348</a:t>
             </a:r>
             <a:endParaRPr lang="en-US" sz="4400" dirty="0"/>
           </a:p>

--- a/docs/nop-bai/CUSTOS-PITCH.pptx
+++ b/docs/nop-bai/CUSTOS-PITCH.pptx
@@ -5622,7 +5622,7 @@
                 <a:ea typeface="Trebuchet MS" pitchFamily="34" charset="-122"/>
                 <a:cs typeface="Trebuchet MS" pitchFamily="34" charset="-120"/>
               </a:rPr>
-              <a:t>348</a:t>
+              <a:t>359</a:t>
             </a:r>
             <a:endParaRPr lang="en-US" sz="4400" dirty="0"/>
           </a:p>

--- a/docs/nop-bai/CUSTOS-PITCH.pptx
+++ b/docs/nop-bai/CUSTOS-PITCH.pptx
@@ -5622,7 +5622,7 @@
                 <a:ea typeface="Trebuchet MS" pitchFamily="34" charset="-122"/>
                 <a:cs typeface="Trebuchet MS" pitchFamily="34" charset="-120"/>
               </a:rPr>
-              <a:t>359</a:t>
+              <a:t>362</a:t>
             </a:r>
             <a:endParaRPr lang="en-US" sz="4400" dirty="0"/>
           </a:p>

--- a/docs/nop-bai/CUSTOS-PITCH.pptx
+++ b/docs/nop-bai/CUSTOS-PITCH.pptx
@@ -5622,7 +5622,7 @@
                 <a:ea typeface="Trebuchet MS" pitchFamily="34" charset="-122"/>
                 <a:cs typeface="Trebuchet MS" pitchFamily="34" charset="-120"/>
               </a:rPr>
-              <a:t>362</a:t>
+              <a:t>367</a:t>
             </a:r>
             <a:endParaRPr lang="en-US" sz="4400" dirty="0"/>
           </a:p>

--- a/docs/nop-bai/CUSTOS-PITCH.pptx
+++ b/docs/nop-bai/CUSTOS-PITCH.pptx
@@ -5622,7 +5622,7 @@
                 <a:ea typeface="Trebuchet MS" pitchFamily="34" charset="-122"/>
                 <a:cs typeface="Trebuchet MS" pitchFamily="34" charset="-120"/>
               </a:rPr>
-              <a:t>367</a:t>
+              <a:t>369</a:t>
             </a:r>
             <a:endParaRPr lang="en-US" sz="4400" dirty="0"/>
           </a:p>

--- a/docs/nop-bai/CUSTOS-PITCH.pptx
+++ b/docs/nop-bai/CUSTOS-PITCH.pptx
@@ -5622,7 +5622,7 @@
                 <a:ea typeface="Trebuchet MS" pitchFamily="34" charset="-122"/>
                 <a:cs typeface="Trebuchet MS" pitchFamily="34" charset="-120"/>
               </a:rPr>
-              <a:t>369</a:t>
+              <a:t>377</a:t>
             </a:r>
             <a:endParaRPr lang="en-US" sz="4400" dirty="0"/>
           </a:p>

--- a/docs/nop-bai/CUSTOS-PITCH.pptx
+++ b/docs/nop-bai/CUSTOS-PITCH.pptx
@@ -5622,7 +5622,7 @@
                 <a:ea typeface="Trebuchet MS" pitchFamily="34" charset="-122"/>
                 <a:cs typeface="Trebuchet MS" pitchFamily="34" charset="-120"/>
               </a:rPr>
-              <a:t>377</a:t>
+              <a:t>378</a:t>
             </a:r>
             <a:endParaRPr lang="en-US" sz="4400" dirty="0"/>
           </a:p>

--- a/docs/nop-bai/CUSTOS-PITCH.pptx
+++ b/docs/nop-bai/CUSTOS-PITCH.pptx
@@ -5622,7 +5622,7 @@
                 <a:ea typeface="Trebuchet MS" pitchFamily="34" charset="-122"/>
                 <a:cs typeface="Trebuchet MS" pitchFamily="34" charset="-120"/>
               </a:rPr>
-              <a:t>378</a:t>
+              <a:t>382</a:t>
             </a:r>
             <a:endParaRPr lang="en-US" sz="4400" dirty="0"/>
           </a:p>

--- a/docs/nop-bai/CUSTOS-PITCH.pptx
+++ b/docs/nop-bai/CUSTOS-PITCH.pptx
@@ -5622,7 +5622,7 @@
                 <a:ea typeface="Trebuchet MS" pitchFamily="34" charset="-122"/>
                 <a:cs typeface="Trebuchet MS" pitchFamily="34" charset="-120"/>
               </a:rPr>
-              <a:t>382</a:t>
+              <a:t>391</a:t>
             </a:r>
             <a:endParaRPr lang="en-US" sz="4400" dirty="0"/>
           </a:p>

--- a/docs/nop-bai/CUSTOS-PITCH.pptx
+++ b/docs/nop-bai/CUSTOS-PITCH.pptx
@@ -5622,7 +5622,7 @@
                 <a:ea typeface="Trebuchet MS" pitchFamily="34" charset="-122"/>
                 <a:cs typeface="Trebuchet MS" pitchFamily="34" charset="-120"/>
               </a:rPr>
-              <a:t>391</a:t>
+              <a:t>395</a:t>
             </a:r>
             <a:endParaRPr lang="en-US" sz="4400" dirty="0"/>
           </a:p>

--- a/docs/nop-bai/CUSTOS-PITCH.pptx
+++ b/docs/nop-bai/CUSTOS-PITCH.pptx
@@ -5622,7 +5622,7 @@
                 <a:ea typeface="Trebuchet MS" pitchFamily="34" charset="-122"/>
                 <a:cs typeface="Trebuchet MS" pitchFamily="34" charset="-120"/>
               </a:rPr>
-              <a:t>395</a:t>
+              <a:t>400</a:t>
             </a:r>
             <a:endParaRPr lang="en-US" sz="4400" dirty="0"/>
           </a:p>
@@ -5856,7 +5856,7 @@
                 <a:ea typeface="Calibri" pitchFamily="34" charset="-122"/>
                 <a:cs typeface="Calibri" pitchFamily="34" charset="-120"/>
               </a:rPr>
-              <a:t>33 mẫu kiểm thử</a:t>
+              <a:t>38 mẫu kiểm thử</a:t>
             </a:r>
             <a:endParaRPr lang="en-US" sz="1100" dirty="0"/>
           </a:p>

--- a/docs/nop-bai/CUSTOS-PITCH.pptx
+++ b/docs/nop-bai/CUSTOS-PITCH.pptx
@@ -5622,7 +5622,7 @@
                 <a:ea typeface="Trebuchet MS" pitchFamily="34" charset="-122"/>
                 <a:cs typeface="Trebuchet MS" pitchFamily="34" charset="-120"/>
               </a:rPr>
-              <a:t>400</a:t>
+              <a:t>403</a:t>
             </a:r>
             <a:endParaRPr lang="en-US" sz="4400" dirty="0"/>
           </a:p>

--- a/docs/nop-bai/CUSTOS-PITCH.pptx
+++ b/docs/nop-bai/CUSTOS-PITCH.pptx
@@ -5622,7 +5622,7 @@
                 <a:ea typeface="Trebuchet MS" pitchFamily="34" charset="-122"/>
                 <a:cs typeface="Trebuchet MS" pitchFamily="34" charset="-120"/>
               </a:rPr>
-              <a:t>403</a:t>
+              <a:t>415</a:t>
             </a:r>
             <a:endParaRPr lang="en-US" sz="4400" dirty="0"/>
           </a:p>

--- a/docs/nop-bai/CUSTOS-PITCH.pptx
+++ b/docs/nop-bai/CUSTOS-PITCH.pptx
@@ -5622,7 +5622,7 @@
                 <a:ea typeface="Trebuchet MS" pitchFamily="34" charset="-122"/>
                 <a:cs typeface="Trebuchet MS" pitchFamily="34" charset="-120"/>
               </a:rPr>
-              <a:t>415</a:t>
+              <a:t>429</a:t>
             </a:r>
             <a:endParaRPr lang="en-US" sz="4400" dirty="0"/>
           </a:p>

--- a/docs/nop-bai/CUSTOS-PITCH.pptx
+++ b/docs/nop-bai/CUSTOS-PITCH.pptx
@@ -2316,7 +2316,7 @@
                 <a:ea typeface="Consolas" pitchFamily="34" charset="-122"/>
                 <a:cs typeface="Consolas" pitchFamily="34" charset="-120"/>
               </a:rPr>
-              <a:t>VÍ HIỆN TẠI CHO HỌ XEM</a:t>
+              <a:t>DỮ LIỆU GIAO DỊCH THÔ</a:t>
             </a:r>
             <a:endParaRPr lang="en-US" sz="1050" dirty="0"/>
           </a:p>
@@ -3900,7 +3900,7 @@
                 <a:ea typeface="Trebuchet MS" pitchFamily="34" charset="-122"/>
                 <a:cs typeface="Trebuchet MS" pitchFamily="34" charset="-120"/>
               </a:rPr>
-              <a:t>Thị trường này đã được chứng minh hộ</a:t>
+              <a:t>Ví lớn nhất Solana đã trả tiền cho đúng năng lực này</a:t>
             </a:r>
             <a:endParaRPr lang="en-US" sz="3400" dirty="0"/>
           </a:p>
@@ -4224,7 +4224,7 @@
                 <a:ea typeface="Calibri" pitchFamily="34" charset="-122"/>
                 <a:cs typeface="Calibri" pitchFamily="34" charset="-120"/>
               </a:rPr>
-              <a:t>Dịch vụ bán rời của Blowfish đã dừng — thị trường có thật, có chỗ trống</a:t>
+              <a:t>Blockaid vẫn bán cho ví khác. Chỗ trống là của Blowfish, không phải cả thị trường</a:t>
             </a:r>
             <a:endParaRPr lang="en-US" sz="1500" dirty="0"/>
           </a:p>
@@ -4255,7 +4255,7 @@
               <a:buNone/>
             </a:pPr>
             <a:r>
-              <a:rPr lang="en-US" sz="1600" i="1" dirty="0">
+              <a:rPr lang="en-US" sz="1500" i="1" dirty="0">
                 <a:solidFill>
                   <a:srgbClr val="B45309"/>
                 </a:solidFill>
@@ -4263,9 +4263,9 @@
                 <a:ea typeface="Calibri" pitchFamily="34" charset="-122"/>
                 <a:cs typeface="Calibri" pitchFamily="34" charset="-120"/>
               </a:rPr>
-              <a:t>Đây là market validation do người khác bỏ tiền chứng minh — không phải lập luận đội tự nghĩ.</a:t>
-            </a:r>
-            <a:endParaRPr lang="en-US" sz="1600" dirty="0"/>
+              <a:t>Đọc được hai cách: thị trường có thật, hoặc năng lực này bị mua về làm nội bộ. Cả hai đều chưa nói ai sẽ trả tiền cho Custos.</a:t>
+            </a:r>
+            <a:endParaRPr lang="en-US" sz="1500" dirty="0"/>
           </a:p>
         </p:txBody>
       </p:sp>
@@ -4681,7 +4681,7 @@
                 <a:ea typeface="Calibri" pitchFamily="34" charset="-122"/>
                 <a:cs typeface="Calibri" pitchFamily="34" charset="-120"/>
               </a:rPr>
-              <a:t>token — TRẦN CỨNG đầu ra của mô hình</a:t>
+              <a:t>token đầu ra — mặc định trong cấu hình đo</a:t>
             </a:r>
             <a:endParaRPr lang="en-US" sz="1500" dirty="0"/>
           </a:p>
@@ -4720,7 +4720,7 @@
                 <a:ea typeface="Consolas" pitchFamily="34" charset="-122"/>
                 <a:cs typeface="Consolas" pitchFamily="34" charset="-120"/>
               </a:rPr>
-              <a:t>chi phí AI mỗi lượt có trần, không trôi được</a:t>
+              <a:t>bên tích hợp nâng được · chưa tính token đầu vào</a:t>
             </a:r>
             <a:endParaRPr lang="en-US" sz="1100" dirty="0"/>
           </a:p>
@@ -5622,7 +5622,7 @@
                 <a:ea typeface="Trebuchet MS" pitchFamily="34" charset="-122"/>
                 <a:cs typeface="Trebuchet MS" pitchFamily="34" charset="-120"/>
               </a:rPr>
-              <a:t>429</a:t>
+              <a:t>436</a:t>
             </a:r>
             <a:endParaRPr lang="en-US" sz="4400" dirty="0"/>
           </a:p>

--- a/docs/nop-bai/CUSTOS-PITCH.pptx
+++ b/docs/nop-bai/CUSTOS-PITCH.pptx
@@ -5622,7 +5622,7 @@
                 <a:ea typeface="Trebuchet MS" pitchFamily="34" charset="-122"/>
                 <a:cs typeface="Trebuchet MS" pitchFamily="34" charset="-120"/>
               </a:rPr>
-              <a:t>436</a:t>
+              <a:t>440</a:t>
             </a:r>
             <a:endParaRPr lang="en-US" sz="4400" dirty="0"/>
           </a:p>

--- a/docs/nop-bai/CUSTOS-PITCH.pptx
+++ b/docs/nop-bai/CUSTOS-PITCH.pptx
@@ -5622,7 +5622,7 @@
                 <a:ea typeface="Trebuchet MS" pitchFamily="34" charset="-122"/>
                 <a:cs typeface="Trebuchet MS" pitchFamily="34" charset="-120"/>
               </a:rPr>
-              <a:t>440</a:t>
+              <a:t>448</a:t>
             </a:r>
             <a:endParaRPr lang="en-US" sz="4400" dirty="0"/>
           </a:p>

--- a/docs/nop-bai/CUSTOS-PITCH.pptx
+++ b/docs/nop-bai/CUSTOS-PITCH.pptx
@@ -5622,7 +5622,7 @@
                 <a:ea typeface="Trebuchet MS" pitchFamily="34" charset="-122"/>
                 <a:cs typeface="Trebuchet MS" pitchFamily="34" charset="-120"/>
               </a:rPr>
-              <a:t>448</a:t>
+              <a:t>451</a:t>
             </a:r>
             <a:endParaRPr lang="en-US" sz="4400" dirty="0"/>
           </a:p>

--- a/docs/nop-bai/CUSTOS-PITCH.pptx
+++ b/docs/nop-bai/CUSTOS-PITCH.pptx
@@ -5622,7 +5622,7 @@
                 <a:ea typeface="Trebuchet MS" pitchFamily="34" charset="-122"/>
                 <a:cs typeface="Trebuchet MS" pitchFamily="34" charset="-120"/>
               </a:rPr>
-              <a:t>451</a:t>
+              <a:t>458</a:t>
             </a:r>
             <a:endParaRPr lang="en-US" sz="4400" dirty="0"/>
           </a:p>

--- a/docs/nop-bai/CUSTOS-PITCH.pptx
+++ b/docs/nop-bai/CUSTOS-PITCH.pptx
@@ -5622,7 +5622,7 @@
                 <a:ea typeface="Trebuchet MS" pitchFamily="34" charset="-122"/>
                 <a:cs typeface="Trebuchet MS" pitchFamily="34" charset="-120"/>
               </a:rPr>
-              <a:t>458</a:t>
+              <a:t>459</a:t>
             </a:r>
             <a:endParaRPr lang="en-US" sz="4400" dirty="0"/>
           </a:p>

--- a/docs/nop-bai/CUSTOS-PITCH.pptx
+++ b/docs/nop-bai/CUSTOS-PITCH.pptx
@@ -5622,7 +5622,7 @@
                 <a:ea typeface="Trebuchet MS" pitchFamily="34" charset="-122"/>
                 <a:cs typeface="Trebuchet MS" pitchFamily="34" charset="-120"/>
               </a:rPr>
-              <a:t>459</a:t>
+              <a:t>462</a:t>
             </a:r>
             <a:endParaRPr lang="en-US" sz="4400" dirty="0"/>
           </a:p>

--- a/docs/nop-bai/CUSTOS-PITCH.pptx
+++ b/docs/nop-bai/CUSTOS-PITCH.pptx
@@ -5622,7 +5622,7 @@
                 <a:ea typeface="Trebuchet MS" pitchFamily="34" charset="-122"/>
                 <a:cs typeface="Trebuchet MS" pitchFamily="34" charset="-120"/>
               </a:rPr>
-              <a:t>462</a:t>
+              <a:t>467</a:t>
             </a:r>
             <a:endParaRPr lang="en-US" sz="4400" dirty="0"/>
           </a:p>

--- a/docs/nop-bai/CUSTOS-PITCH.pptx
+++ b/docs/nop-bai/CUSTOS-PITCH.pptx
@@ -15,9 +15,10 @@
     <p:sldId id="263" r:id="rId9"/>
     <p:sldId id="264" r:id="rId10"/>
     <p:sldId id="265" r:id="rId11"/>
+    <p:sldId id="266" r:id="rId12"/>
   </p:sldIdLst>
   <p:notesMasterIdLst>
-    <p:notesMasterId r:id="rId12"/>
+    <p:notesMasterId r:id="rId13"/>
   </p:notesMasterIdLst>
   <p:sldSz cx="12191695" cy="6858000"/>
   <p:notesSz cx="6858000" cy="12191695"/>
@@ -599,8 +600,13 @@
           <a:p>
             <a:r>
               <a:rPr lang="en-US" dirty="0"/>
-              <a:t>3:55–4:00 — Một câu, dừng. Đừng cảm ơn dài dòng, để dành thời gian cho Q&amp;A.
-Các câu hỏi khó có sẵn câu trả lời ở PITCH-VA-PHAN-BIEN.md mục 3, 4 và 4b. Câu build-vs-buy (số 10) quan trọng ngang câu 1 ở track này.</a:t>
+              <a:t>3:30–3:55 — Đọc đúng số, không làm tròn lên.
+DÒNG CUỐI CÙNG LÀ DÒNG QUAN TRỌNG NHẤT SLIDE NÀY: tự nói ra chỗ còn thiếu. Thừa nhận trước thì mất một chút; để giám khảo moi ra thì mất nhiều hơn.
+SỐ NGƯỜI DÙNG — nói kèm ĐÚNG ba mệnh đề này, đừng bỏ mệnh đề nào:
+  · 13/20 nêu được hậu quả. "Một phần" (5) KHÔNG gộp vào.
+  · 4/20 vẫn ký — nhưng 2 trong số đó HIỂU ĐÚNG và cố ý chấp nhận rủi ro trên ví phụ. Chỉ 2 người ký vì đọc nhầm.
+  · Đo ngày 29/08 và 30/08/2026 trên bản giao diện LÚC ĐÓ; tấm cảnh báo đã được thiết kế lại sau đó. ĐỪNG nói "đo trên đúng màn hình các anh chị vừa xem".
+[!] Hỏi qua tin nhắn và video call, một người hỏi cả 20 — không có chấm chéo. Nói ra nếu bị hỏi về phương pháp.</a:t>
             </a:r>
             <a:endParaRPr lang="en-US" dirty="0"/>
           </a:p>
@@ -624,6 +630,95 @@
             <a:fld id="{F7021451-1387-4CA6-816F-3879F97B5CBC}" type="slidenum">
               <a:rPr lang="en-US"/>
               <a:t>10</a:t>
+            </a:fld>
+            <a:endParaRPr lang="en-US"/>
+          </a:p>
+        </p:txBody>
+      </p:sp>
+    </p:spTree>
+    <p:extLst>
+      <p:ext uri="{BB962C8B-B14F-4D97-AF65-F5344CB8AC3E}">
+        <p14:creationId xmlns:p14="http://schemas.microsoft.com/office/powerpoint/2010/main" val="1024086991"/>
+      </p:ext>
+    </p:extLst>
+  </p:cSld>
+  <p:clrMapOvr>
+    <a:masterClrMapping/>
+  </p:clrMapOvr>
+</p:notes>
+</file>
+
+<file path=ppt/notesSlides/notesSlide11.xml><?xml version="1.0" encoding="utf-8"?>
+<p:notes xmlns:a="http://schemas.openxmlformats.org/drawingml/2006/main" xmlns:r="http://schemas.openxmlformats.org/officeDocument/2006/relationships" xmlns:p="http://schemas.openxmlformats.org/presentationml/2006/main">
+  <p:cSld>
+    <p:spTree>
+      <p:nvGrpSpPr>
+        <p:cNvPr id="1" name=""/>
+        <p:cNvGrpSpPr/>
+        <p:nvPr/>
+      </p:nvGrpSpPr>
+      <p:grpSpPr>
+        <a:xfrm>
+          <a:off x="0" y="0"/>
+          <a:ext cx="0" cy="0"/>
+          <a:chOff x="0" y="0"/>
+          <a:chExt cx="0" cy="0"/>
+        </a:xfrm>
+      </p:grpSpPr>
+      <p:sp>
+        <p:nvSpPr>
+          <p:cNvPr id="2" name="Slide Image Placeholder 1"/>
+          <p:cNvSpPr>
+            <a:spLocks noGrp="1" noRot="1" noChangeAspect="1"/>
+          </p:cNvSpPr>
+          <p:nvPr>
+            <p:ph type="sldImg"/>
+          </p:nvPr>
+        </p:nvSpPr>
+        <p:spPr/>
+      </p:sp>
+      <p:sp>
+        <p:nvSpPr>
+          <p:cNvPr id="3" name="Notes Placeholder 2"/>
+          <p:cNvSpPr>
+            <a:spLocks noGrp="1"/>
+          </p:cNvSpPr>
+          <p:nvPr>
+            <p:ph type="body" idx="1"/>
+          </p:nvPr>
+        </p:nvSpPr>
+        <p:spPr/>
+        <p:txBody>
+          <a:bodyPr/>
+          <a:lstStyle/>
+          <a:p>
+            <a:r>
+              <a:rPr lang="en-US" dirty="0"/>
+              <a:t>3:55–4:00 — Một câu, dừng. Đừng cảm ơn dài dòng, để dành thời gian cho Q&amp;A.
+Các câu hỏi khó có sẵn câu trả lời ở PITCH-VA-PHAN-BIEN.md mục 3, 4 và 4b. Câu build-vs-buy (số 10) quan trọng ngang câu 1 ở track này.</a:t>
+            </a:r>
+            <a:endParaRPr lang="en-US" dirty="0"/>
+          </a:p>
+        </p:txBody>
+      </p:sp>
+      <p:sp>
+        <p:nvSpPr>
+          <p:cNvPr id="4" name="Slide Number Placeholder 3"/>
+          <p:cNvSpPr>
+            <a:spLocks noGrp="1"/>
+          </p:cNvSpPr>
+          <p:nvPr>
+            <p:ph type="sldNum" sz="quarter" idx="10"/>
+          </p:nvPr>
+        </p:nvSpPr>
+        <p:spPr/>
+        <p:txBody>
+          <a:bodyPr/>
+          <a:lstStyle/>
+          <a:p>
+            <a:fld id="{F7021451-1387-4CA6-816F-3879F97B5CBC}" type="slidenum">
+              <a:rPr lang="en-US"/>
+              <a:t>11</a:t>
             </a:fld>
             <a:endParaRPr lang="en-US"/>
           </a:p>
@@ -1224,8 +1319,10 @@
           <a:p>
             <a:r>
               <a:rPr lang="en-US" dirty="0"/>
-              <a:t>3:10–3:30 — Câu “AI không được xác nhận an toàn” là câu ghi điểm với giám khảo bảo mật. Nói NGUYÊN VĂN.
-Nếu bị hỏi AI có tham gia quyết verdict không: KHÔNG. level chỉ do engine luật tạo ra.</a:t>
+              <a:t>3:10–3:25 — Câu chốt của slide này: giấy phép MIT KHOÁ mô hình, không phải ngược lại. Ai cũng fork được SDK, nên thứ bán được phải là thứ không copy đi cùng repo: luật được cập nhật, người chịu trách nhiệm, cam kết vận hành.
+[!] KHÔNG nói $49 là giá của Custos. Đó là giá Helius/QuickNode — nó chứng minh người mua QUEN trả tiền hạ tầng theo tháng, không chứng minh gì về giá của mình.
+[!] Nếu bị hỏi 'ai duyệt chi' — trả lời thẳng: CHƯA BIẾT, đó là câu đầu tiên buyer interview sẽ hỏi.
+[!] Nếu bị hỏi 'lỡ họ tự làm được thì sao' — đó là điều kiện mô hình sai, đã ghi trong docs/MO-HINH-DOANH-THU.md mục 6. Nói được điều kiện mình sai là điểm cộng, không phải điểm trừ.</a:t>
             </a:r>
             <a:endParaRPr lang="en-US" dirty="0"/>
           </a:p>
@@ -1313,13 +1410,8 @@
           <a:p>
             <a:r>
               <a:rPr lang="en-US" dirty="0"/>
-              <a:t>3:30–3:55 — Đọc đúng số, không làm tròn lên.
-DÒNG CUỐI CÙNG LÀ DÒNG QUAN TRỌNG NHẤT SLIDE NÀY: tự nói ra chỗ còn thiếu. Thừa nhận trước thì mất một chút; để giám khảo moi ra thì mất nhiều hơn.
-SỐ NGƯỜI DÙNG — nói kèm ĐÚNG ba mệnh đề này, đừng bỏ mệnh đề nào:
-  · 13/20 nêu được hậu quả. "Một phần" (5) KHÔNG gộp vào.
-  · 4/20 vẫn ký — nhưng 2 trong số đó HIỂU ĐÚNG và cố ý chấp nhận rủi ro trên ví phụ. Chỉ 2 người ký vì đọc nhầm.
-  · Đo ngày 29/08 và 30/08/2026 trên bản giao diện LÚC ĐÓ; tấm cảnh báo đã được thiết kế lại sau đó. ĐỪNG nói "đo trên đúng màn hình các anh chị vừa xem".
-[!] Hỏi qua tin nhắn và video call, một người hỏi cả 20 — không có chấm chéo. Nói ra nếu bị hỏi về phương pháp.</a:t>
+              <a:t>3:10–3:30 — Câu “AI không được xác nhận an toàn” là câu ghi điểm với giám khảo bảo mật. Nói NGUYÊN VĂN.
+Nếu bị hỏi AI có tham gia quyết verdict không: KHÔNG. level chỉ do engine luật tạo ra.</a:t>
             </a:r>
             <a:endParaRPr lang="en-US" dirty="0"/>
           </a:p>
@@ -1944,6 +2036,814 @@
     <p:bg>
       <p:bgPr>
         <a:solidFill>
+          <a:srgbClr val="F7F6F2"/>
+        </a:solidFill>
+      </p:bgPr>
+    </p:bg>
+    <p:spTree>
+      <p:nvGrpSpPr>
+        <p:cNvPr id="1" name=""/>
+        <p:cNvGrpSpPr/>
+        <p:nvPr/>
+      </p:nvGrpSpPr>
+      <p:grpSpPr>
+        <a:xfrm>
+          <a:off x="0" y="0"/>
+          <a:ext cx="0" cy="0"/>
+          <a:chOff x="0" y="0"/>
+          <a:chExt cx="0" cy="0"/>
+        </a:xfrm>
+      </p:grpSpPr>
+      <p:sp>
+        <p:nvSpPr>
+          <p:cNvPr id="2" name="Shape 0"/>
+          <p:cNvSpPr/>
+          <p:nvPr/>
+        </p:nvSpPr>
+        <p:spPr>
+          <a:xfrm>
+            <a:off x="0" y="566928"/>
+            <a:ext cx="82296" cy="566928"/>
+          </a:xfrm>
+          <a:prstGeom prst="rect">
+            <a:avLst/>
+          </a:prstGeom>
+          <a:solidFill>
+            <a:srgbClr val="F5A524"/>
+          </a:solidFill>
+          <a:ln/>
+        </p:spPr>
+      </p:sp>
+      <p:sp>
+        <p:nvSpPr>
+          <p:cNvPr id="3" name="Text 1"/>
+          <p:cNvSpPr/>
+          <p:nvPr/>
+        </p:nvSpPr>
+        <p:spPr>
+          <a:xfrm>
+            <a:off x="685800" y="548640"/>
+            <a:ext cx="10820095" cy="1051560"/>
+          </a:xfrm>
+          <a:prstGeom prst="rect">
+            <a:avLst/>
+          </a:prstGeom>
+          <a:noFill/>
+          <a:ln/>
+        </p:spPr>
+        <p:txBody>
+          <a:bodyPr wrap="square" lIns="0" tIns="0" rIns="0" bIns="0" rtlCol="0" anchor="t"/>
+          <a:lstStyle/>
+          <a:p>
+            <a:pPr algn="l" indent="0" marL="0">
+              <a:buNone/>
+            </a:pPr>
+            <a:r>
+              <a:rPr lang="en-US" sz="3400" b="1" dirty="0">
+                <a:solidFill>
+                  <a:srgbClr val="14181F"/>
+                </a:solidFill>
+                <a:latin typeface="Trebuchet MS" pitchFamily="34" charset="0"/>
+                <a:ea typeface="Trebuchet MS" pitchFamily="34" charset="-122"/>
+                <a:cs typeface="Trebuchet MS" pitchFamily="34" charset="-120"/>
+              </a:rPr>
+              <a:t>Con số thật — đo được, truy được nguồn</a:t>
+            </a:r>
+            <a:endParaRPr lang="en-US" sz="3400" dirty="0"/>
+          </a:p>
+        </p:txBody>
+      </p:sp>
+      <p:sp>
+        <p:nvSpPr>
+          <p:cNvPr id="4" name="Shape 2"/>
+          <p:cNvSpPr/>
+          <p:nvPr/>
+        </p:nvSpPr>
+        <p:spPr>
+          <a:xfrm>
+            <a:off x="685800" y="1874520"/>
+            <a:ext cx="2327834" cy="2377440"/>
+          </a:xfrm>
+          <a:prstGeom prst="roundRect">
+            <a:avLst>
+              <a:gd name="adj" fmla="val 3535"/>
+            </a:avLst>
+          </a:prstGeom>
+          <a:solidFill>
+            <a:srgbClr val="FFFFFF"/>
+          </a:solidFill>
+          <a:ln w="12700">
+            <a:solidFill>
+              <a:srgbClr val="047857"/>
+            </a:solidFill>
+            <a:prstDash val="solid"/>
+          </a:ln>
+        </p:spPr>
+      </p:sp>
+      <p:sp>
+        <p:nvSpPr>
+          <p:cNvPr id="5" name="Text 3"/>
+          <p:cNvSpPr/>
+          <p:nvPr/>
+        </p:nvSpPr>
+        <p:spPr>
+          <a:xfrm>
+            <a:off x="914400" y="2057400"/>
+            <a:ext cx="1870634" cy="868680"/>
+          </a:xfrm>
+          <a:prstGeom prst="rect">
+            <a:avLst/>
+          </a:prstGeom>
+          <a:noFill/>
+          <a:ln/>
+        </p:spPr>
+        <p:txBody>
+          <a:bodyPr wrap="square" lIns="0" tIns="0" rIns="0" bIns="0" rtlCol="0" anchor="ctr"/>
+          <a:lstStyle/>
+          <a:p>
+            <a:pPr indent="0" marL="0">
+              <a:buNone/>
+            </a:pPr>
+            <a:r>
+              <a:rPr lang="en-US" sz="4400" b="1" dirty="0">
+                <a:solidFill>
+                  <a:srgbClr val="047857"/>
+                </a:solidFill>
+                <a:latin typeface="Trebuchet MS" pitchFamily="34" charset="0"/>
+                <a:ea typeface="Trebuchet MS" pitchFamily="34" charset="-122"/>
+                <a:cs typeface="Trebuchet MS" pitchFamily="34" charset="-120"/>
+              </a:rPr>
+              <a:t>0</a:t>
+            </a:r>
+            <a:endParaRPr lang="en-US" sz="4400" dirty="0"/>
+          </a:p>
+        </p:txBody>
+      </p:sp>
+      <p:sp>
+        <p:nvSpPr>
+          <p:cNvPr id="6" name="Text 4"/>
+          <p:cNvSpPr/>
+          <p:nvPr/>
+        </p:nvSpPr>
+        <p:spPr>
+          <a:xfrm>
+            <a:off x="914400" y="2926080"/>
+            <a:ext cx="1870634" cy="548640"/>
+          </a:xfrm>
+          <a:prstGeom prst="rect">
+            <a:avLst/>
+          </a:prstGeom>
+          <a:noFill/>
+          <a:ln/>
+        </p:spPr>
+        <p:txBody>
+          <a:bodyPr wrap="square" lIns="0" tIns="0" rIns="0" bIns="0" rtlCol="0" anchor="ctr"/>
+          <a:lstStyle/>
+          <a:p>
+            <a:pPr indent="0" marL="0">
+              <a:lnSpc>
+                <a:spcPts val="1900"/>
+              </a:lnSpc>
+              <a:buNone/>
+            </a:pPr>
+            <a:r>
+              <a:rPr lang="en-US" sz="1450" dirty="0">
+                <a:solidFill>
+                  <a:srgbClr val="14181F"/>
+                </a:solidFill>
+                <a:latin typeface="Calibri" pitchFamily="34" charset="0"/>
+                <a:ea typeface="Calibri" pitchFamily="34" charset="-122"/>
+                <a:cs typeface="Calibri" pitchFamily="34" charset="-120"/>
+              </a:rPr>
+              <a:t>giao dịch bị CÁO BUỘC</a:t>
+            </a:r>
+            <a:endParaRPr lang="en-US" sz="1450" dirty="0"/>
+          </a:p>
+        </p:txBody>
+      </p:sp>
+      <p:sp>
+        <p:nvSpPr>
+          <p:cNvPr id="7" name="Text 5"/>
+          <p:cNvSpPr/>
+          <p:nvPr/>
+        </p:nvSpPr>
+        <p:spPr>
+          <a:xfrm>
+            <a:off x="914400" y="3493008"/>
+            <a:ext cx="1870634" cy="640080"/>
+          </a:xfrm>
+          <a:prstGeom prst="rect">
+            <a:avLst/>
+          </a:prstGeom>
+          <a:noFill/>
+          <a:ln/>
+        </p:spPr>
+        <p:txBody>
+          <a:bodyPr wrap="square" lIns="0" tIns="0" rIns="0" bIns="0" rtlCol="0" anchor="ctr"/>
+          <a:lstStyle/>
+          <a:p>
+            <a:pPr indent="0" marL="0">
+              <a:lnSpc>
+                <a:spcPts val="1600"/>
+              </a:lnSpc>
+              <a:buNone/>
+            </a:pPr>
+            <a:r>
+              <a:rPr lang="en-US" sz="1100" dirty="0">
+                <a:solidFill>
+                  <a:srgbClr val="5E6673"/>
+                </a:solidFill>
+                <a:latin typeface="Calibri" pitchFamily="34" charset="0"/>
+                <a:ea typeface="Calibri" pitchFamily="34" charset="-122"/>
+                <a:cs typeface="Calibri" pitchFamily="34" charset="-120"/>
+              </a:rPr>
+              <a:t>trên 9 giao dịch SPL công khai đã lưu offline · 7 ở mức Cần xem kỹ · cohort chưa gán nhãn ground truth</a:t>
+            </a:r>
+            <a:endParaRPr lang="en-US" sz="1100" dirty="0"/>
+          </a:p>
+        </p:txBody>
+      </p:sp>
+      <p:sp>
+        <p:nvSpPr>
+          <p:cNvPr id="8" name="Shape 6"/>
+          <p:cNvSpPr/>
+          <p:nvPr/>
+        </p:nvSpPr>
+        <p:spPr>
+          <a:xfrm>
+            <a:off x="3516554" y="1874520"/>
+            <a:ext cx="2327834" cy="2377440"/>
+          </a:xfrm>
+          <a:prstGeom prst="roundRect">
+            <a:avLst>
+              <a:gd name="adj" fmla="val 3535"/>
+            </a:avLst>
+          </a:prstGeom>
+          <a:solidFill>
+            <a:srgbClr val="FFFFFF"/>
+          </a:solidFill>
+          <a:ln w="12700">
+            <a:solidFill>
+              <a:srgbClr val="DCD9D0"/>
+            </a:solidFill>
+            <a:prstDash val="solid"/>
+          </a:ln>
+        </p:spPr>
+      </p:sp>
+      <p:sp>
+        <p:nvSpPr>
+          <p:cNvPr id="9" name="Text 7"/>
+          <p:cNvSpPr/>
+          <p:nvPr/>
+        </p:nvSpPr>
+        <p:spPr>
+          <a:xfrm>
+            <a:off x="3745154" y="2057400"/>
+            <a:ext cx="1870634" cy="868680"/>
+          </a:xfrm>
+          <a:prstGeom prst="rect">
+            <a:avLst/>
+          </a:prstGeom>
+          <a:noFill/>
+          <a:ln/>
+        </p:spPr>
+        <p:txBody>
+          <a:bodyPr wrap="square" lIns="0" tIns="0" rIns="0" bIns="0" rtlCol="0" anchor="ctr"/>
+          <a:lstStyle/>
+          <a:p>
+            <a:pPr indent="0" marL="0">
+              <a:buNone/>
+            </a:pPr>
+            <a:r>
+              <a:rPr lang="en-US" sz="4400" b="1" dirty="0">
+                <a:solidFill>
+                  <a:srgbClr val="14181F"/>
+                </a:solidFill>
+                <a:latin typeface="Trebuchet MS" pitchFamily="34" charset="0"/>
+                <a:ea typeface="Trebuchet MS" pitchFamily="34" charset="-122"/>
+                <a:cs typeface="Trebuchet MS" pitchFamily="34" charset="-120"/>
+              </a:rPr>
+              <a:t>467</a:t>
+            </a:r>
+            <a:endParaRPr lang="en-US" sz="4400" dirty="0"/>
+          </a:p>
+        </p:txBody>
+      </p:sp>
+      <p:sp>
+        <p:nvSpPr>
+          <p:cNvPr id="10" name="Text 8"/>
+          <p:cNvSpPr/>
+          <p:nvPr/>
+        </p:nvSpPr>
+        <p:spPr>
+          <a:xfrm>
+            <a:off x="3745154" y="2926080"/>
+            <a:ext cx="1870634" cy="548640"/>
+          </a:xfrm>
+          <a:prstGeom prst="rect">
+            <a:avLst/>
+          </a:prstGeom>
+          <a:noFill/>
+          <a:ln/>
+        </p:spPr>
+        <p:txBody>
+          <a:bodyPr wrap="square" lIns="0" tIns="0" rIns="0" bIns="0" rtlCol="0" anchor="ctr"/>
+          <a:lstStyle/>
+          <a:p>
+            <a:pPr indent="0" marL="0">
+              <a:lnSpc>
+                <a:spcPts val="1900"/>
+              </a:lnSpc>
+              <a:buNone/>
+            </a:pPr>
+            <a:r>
+              <a:rPr lang="en-US" sz="1450" dirty="0">
+                <a:solidFill>
+                  <a:srgbClr val="14181F"/>
+                </a:solidFill>
+                <a:latin typeface="Calibri" pitchFamily="34" charset="0"/>
+                <a:ea typeface="Calibri" pitchFamily="34" charset="-122"/>
+                <a:cs typeface="Calibri" pitchFamily="34" charset="-120"/>
+              </a:rPr>
+              <a:t>test tự động</a:t>
+            </a:r>
+            <a:endParaRPr lang="en-US" sz="1450" dirty="0"/>
+          </a:p>
+        </p:txBody>
+      </p:sp>
+      <p:sp>
+        <p:nvSpPr>
+          <p:cNvPr id="11" name="Text 9"/>
+          <p:cNvSpPr/>
+          <p:nvPr/>
+        </p:nvSpPr>
+        <p:spPr>
+          <a:xfrm>
+            <a:off x="3745154" y="3493008"/>
+            <a:ext cx="1870634" cy="640080"/>
+          </a:xfrm>
+          <a:prstGeom prst="rect">
+            <a:avLst/>
+          </a:prstGeom>
+          <a:noFill/>
+          <a:ln/>
+        </p:spPr>
+        <p:txBody>
+          <a:bodyPr wrap="square" lIns="0" tIns="0" rIns="0" bIns="0" rtlCol="0" anchor="ctr"/>
+          <a:lstStyle/>
+          <a:p>
+            <a:pPr indent="0" marL="0">
+              <a:lnSpc>
+                <a:spcPts val="1600"/>
+              </a:lnSpc>
+              <a:buNone/>
+            </a:pPr>
+            <a:r>
+              <a:rPr lang="en-US" sz="1100" dirty="0">
+                <a:solidFill>
+                  <a:srgbClr val="5E6673"/>
+                </a:solidFill>
+                <a:latin typeface="Calibri" pitchFamily="34" charset="0"/>
+                <a:ea typeface="Calibri" pitchFamily="34" charset="-122"/>
+                <a:cs typeface="Calibri" pitchFamily="34" charset="-120"/>
+              </a:rPr>
+              <a:t>chạy lại mỗi lần deploy</a:t>
+            </a:r>
+            <a:endParaRPr lang="en-US" sz="1100" dirty="0"/>
+          </a:p>
+        </p:txBody>
+      </p:sp>
+      <p:sp>
+        <p:nvSpPr>
+          <p:cNvPr id="12" name="Shape 10"/>
+          <p:cNvSpPr/>
+          <p:nvPr/>
+        </p:nvSpPr>
+        <p:spPr>
+          <a:xfrm>
+            <a:off x="6347308" y="1874520"/>
+            <a:ext cx="2327834" cy="2377440"/>
+          </a:xfrm>
+          <a:prstGeom prst="roundRect">
+            <a:avLst>
+              <a:gd name="adj" fmla="val 3535"/>
+            </a:avLst>
+          </a:prstGeom>
+          <a:solidFill>
+            <a:srgbClr val="FFFFFF"/>
+          </a:solidFill>
+          <a:ln w="12700">
+            <a:solidFill>
+              <a:srgbClr val="DCD9D0"/>
+            </a:solidFill>
+            <a:prstDash val="solid"/>
+          </a:ln>
+        </p:spPr>
+      </p:sp>
+      <p:sp>
+        <p:nvSpPr>
+          <p:cNvPr id="13" name="Text 11"/>
+          <p:cNvSpPr/>
+          <p:nvPr/>
+        </p:nvSpPr>
+        <p:spPr>
+          <a:xfrm>
+            <a:off x="6575908" y="2057400"/>
+            <a:ext cx="1870634" cy="868680"/>
+          </a:xfrm>
+          <a:prstGeom prst="rect">
+            <a:avLst/>
+          </a:prstGeom>
+          <a:noFill/>
+          <a:ln/>
+        </p:spPr>
+        <p:txBody>
+          <a:bodyPr wrap="square" lIns="0" tIns="0" rIns="0" bIns="0" rtlCol="0" anchor="ctr"/>
+          <a:lstStyle/>
+          <a:p>
+            <a:pPr indent="0" marL="0">
+              <a:buNone/>
+            </a:pPr>
+            <a:r>
+              <a:rPr lang="en-US" sz="4400" b="1" dirty="0">
+                <a:solidFill>
+                  <a:srgbClr val="14181F"/>
+                </a:solidFill>
+                <a:latin typeface="Trebuchet MS" pitchFamily="34" charset="0"/>
+                <a:ea typeface="Trebuchet MS" pitchFamily="34" charset="-122"/>
+                <a:cs typeface="Trebuchet MS" pitchFamily="34" charset="-120"/>
+              </a:rPr>
+              <a:t>14</a:t>
+            </a:r>
+            <a:endParaRPr lang="en-US" sz="4400" dirty="0"/>
+          </a:p>
+        </p:txBody>
+      </p:sp>
+      <p:sp>
+        <p:nvSpPr>
+          <p:cNvPr id="14" name="Text 12"/>
+          <p:cNvSpPr/>
+          <p:nvPr/>
+        </p:nvSpPr>
+        <p:spPr>
+          <a:xfrm>
+            <a:off x="6575908" y="2926080"/>
+            <a:ext cx="1870634" cy="548640"/>
+          </a:xfrm>
+          <a:prstGeom prst="rect">
+            <a:avLst/>
+          </a:prstGeom>
+          <a:noFill/>
+          <a:ln/>
+        </p:spPr>
+        <p:txBody>
+          <a:bodyPr wrap="square" lIns="0" tIns="0" rIns="0" bIns="0" rtlCol="0" anchor="ctr"/>
+          <a:lstStyle/>
+          <a:p>
+            <a:pPr indent="0" marL="0">
+              <a:lnSpc>
+                <a:spcPts val="1900"/>
+              </a:lnSpc>
+              <a:buNone/>
+            </a:pPr>
+            <a:r>
+              <a:rPr lang="en-US" sz="1450" dirty="0">
+                <a:solidFill>
+                  <a:srgbClr val="14181F"/>
+                </a:solidFill>
+                <a:latin typeface="Calibri" pitchFamily="34" charset="0"/>
+                <a:ea typeface="Calibri" pitchFamily="34" charset="-122"/>
+                <a:cs typeface="Calibri" pitchFamily="34" charset="-120"/>
+              </a:rPr>
+              <a:t>luật xác định</a:t>
+            </a:r>
+            <a:endParaRPr lang="en-US" sz="1450" dirty="0"/>
+          </a:p>
+        </p:txBody>
+      </p:sp>
+      <p:sp>
+        <p:nvSpPr>
+          <p:cNvPr id="15" name="Text 13"/>
+          <p:cNvSpPr/>
+          <p:nvPr/>
+        </p:nvSpPr>
+        <p:spPr>
+          <a:xfrm>
+            <a:off x="6575908" y="3493008"/>
+            <a:ext cx="1870634" cy="640080"/>
+          </a:xfrm>
+          <a:prstGeom prst="rect">
+            <a:avLst/>
+          </a:prstGeom>
+          <a:noFill/>
+          <a:ln/>
+        </p:spPr>
+        <p:txBody>
+          <a:bodyPr wrap="square" lIns="0" tIns="0" rIns="0" bIns="0" rtlCol="0" anchor="ctr"/>
+          <a:lstStyle/>
+          <a:p>
+            <a:pPr indent="0" marL="0">
+              <a:lnSpc>
+                <a:spcPts val="1600"/>
+              </a:lnSpc>
+              <a:buNone/>
+            </a:pPr>
+            <a:r>
+              <a:rPr lang="en-US" sz="1100" dirty="0">
+                <a:solidFill>
+                  <a:srgbClr val="5E6673"/>
+                </a:solidFill>
+                <a:latin typeface="Calibri" pitchFamily="34" charset="0"/>
+                <a:ea typeface="Calibri" pitchFamily="34" charset="-122"/>
+                <a:cs typeface="Calibri" pitchFamily="34" charset="-120"/>
+              </a:rPr>
+              <a:t>38 mẫu kiểm thử</a:t>
+            </a:r>
+            <a:endParaRPr lang="en-US" sz="1100" dirty="0"/>
+          </a:p>
+        </p:txBody>
+      </p:sp>
+      <p:sp>
+        <p:nvSpPr>
+          <p:cNvPr id="16" name="Shape 14"/>
+          <p:cNvSpPr/>
+          <p:nvPr/>
+        </p:nvSpPr>
+        <p:spPr>
+          <a:xfrm>
+            <a:off x="9178061" y="1874520"/>
+            <a:ext cx="2327834" cy="2377440"/>
+          </a:xfrm>
+          <a:prstGeom prst="roundRect">
+            <a:avLst>
+              <a:gd name="adj" fmla="val 3535"/>
+            </a:avLst>
+          </a:prstGeom>
+          <a:solidFill>
+            <a:srgbClr val="FFFFFF"/>
+          </a:solidFill>
+          <a:ln w="12700">
+            <a:solidFill>
+              <a:srgbClr val="DCD9D0"/>
+            </a:solidFill>
+            <a:prstDash val="solid"/>
+          </a:ln>
+        </p:spPr>
+      </p:sp>
+      <p:sp>
+        <p:nvSpPr>
+          <p:cNvPr id="17" name="Text 15"/>
+          <p:cNvSpPr/>
+          <p:nvPr/>
+        </p:nvSpPr>
+        <p:spPr>
+          <a:xfrm>
+            <a:off x="9406661" y="2057400"/>
+            <a:ext cx="1870634" cy="868680"/>
+          </a:xfrm>
+          <a:prstGeom prst="rect">
+            <a:avLst/>
+          </a:prstGeom>
+          <a:noFill/>
+          <a:ln/>
+        </p:spPr>
+        <p:txBody>
+          <a:bodyPr wrap="square" lIns="0" tIns="0" rIns="0" bIns="0" rtlCol="0" anchor="ctr"/>
+          <a:lstStyle/>
+          <a:p>
+            <a:pPr indent="0" marL="0">
+              <a:buNone/>
+            </a:pPr>
+            <a:r>
+              <a:rPr lang="en-US" sz="4400" b="1" dirty="0">
+                <a:solidFill>
+                  <a:srgbClr val="B45309"/>
+                </a:solidFill>
+                <a:latin typeface="Trebuchet MS" pitchFamily="34" charset="0"/>
+                <a:ea typeface="Trebuchet MS" pitchFamily="34" charset="-122"/>
+                <a:cs typeface="Trebuchet MS" pitchFamily="34" charset="-120"/>
+              </a:rPr>
+              <a:t>82%</a:t>
+            </a:r>
+            <a:endParaRPr lang="en-US" sz="4400" dirty="0"/>
+          </a:p>
+        </p:txBody>
+      </p:sp>
+      <p:sp>
+        <p:nvSpPr>
+          <p:cNvPr id="18" name="Text 16"/>
+          <p:cNvSpPr/>
+          <p:nvPr/>
+        </p:nvSpPr>
+        <p:spPr>
+          <a:xfrm>
+            <a:off x="9406661" y="2926080"/>
+            <a:ext cx="1870634" cy="548640"/>
+          </a:xfrm>
+          <a:prstGeom prst="rect">
+            <a:avLst/>
+          </a:prstGeom>
+          <a:noFill/>
+          <a:ln/>
+        </p:spPr>
+        <p:txBody>
+          <a:bodyPr wrap="square" lIns="0" tIns="0" rIns="0" bIns="0" rtlCol="0" anchor="ctr"/>
+          <a:lstStyle/>
+          <a:p>
+            <a:pPr indent="0" marL="0">
+              <a:lnSpc>
+                <a:spcPts val="1900"/>
+              </a:lnSpc>
+              <a:buNone/>
+            </a:pPr>
+            <a:r>
+              <a:rPr lang="en-US" sz="1450" dirty="0">
+                <a:solidFill>
+                  <a:srgbClr val="14181F"/>
+                </a:solidFill>
+                <a:latin typeface="Calibri" pitchFamily="34" charset="0"/>
+                <a:ea typeface="Calibri" pitchFamily="34" charset="-122"/>
+                <a:cs typeface="Calibri" pitchFamily="34" charset="-120"/>
+              </a:rPr>
+              <a:t>lệnh đọc hiểu được</a:t>
+            </a:r>
+            <a:endParaRPr lang="en-US" sz="1450" dirty="0"/>
+          </a:p>
+        </p:txBody>
+      </p:sp>
+      <p:sp>
+        <p:nvSpPr>
+          <p:cNvPr id="19" name="Text 17"/>
+          <p:cNvSpPr/>
+          <p:nvPr/>
+        </p:nvSpPr>
+        <p:spPr>
+          <a:xfrm>
+            <a:off x="9406661" y="3493008"/>
+            <a:ext cx="1870634" cy="640080"/>
+          </a:xfrm>
+          <a:prstGeom prst="rect">
+            <a:avLst/>
+          </a:prstGeom>
+          <a:noFill/>
+          <a:ln/>
+        </p:spPr>
+        <p:txBody>
+          <a:bodyPr wrap="square" lIns="0" tIns="0" rIns="0" bIns="0" rtlCol="0" anchor="ctr"/>
+          <a:lstStyle/>
+          <a:p>
+            <a:pPr indent="0" marL="0">
+              <a:lnSpc>
+                <a:spcPts val="1600"/>
+              </a:lnSpc>
+              <a:buNone/>
+            </a:pPr>
+            <a:r>
+              <a:rPr lang="en-US" sz="1100" dirty="0">
+                <a:solidFill>
+                  <a:srgbClr val="5E6673"/>
+                </a:solidFill>
+                <a:latin typeface="Calibri" pitchFamily="34" charset="0"/>
+                <a:ea typeface="Calibri" pitchFamily="34" charset="-122"/>
+                <a:cs typeface="Calibri" pitchFamily="34" charset="-120"/>
+              </a:rPr>
+              <a:t>phần còn lại KHÔNG đoán</a:t>
+            </a:r>
+            <a:endParaRPr lang="en-US" sz="1100" dirty="0"/>
+          </a:p>
+        </p:txBody>
+      </p:sp>
+      <p:sp>
+        <p:nvSpPr>
+          <p:cNvPr id="20" name="Text 18"/>
+          <p:cNvSpPr/>
+          <p:nvPr/>
+        </p:nvSpPr>
+        <p:spPr>
+          <a:xfrm>
+            <a:off x="685800" y="4572000"/>
+            <a:ext cx="10820095" cy="384048"/>
+          </a:xfrm>
+          <a:prstGeom prst="rect">
+            <a:avLst/>
+          </a:prstGeom>
+          <a:noFill/>
+          <a:ln/>
+        </p:spPr>
+        <p:txBody>
+          <a:bodyPr wrap="square" lIns="0" tIns="0" rIns="0" bIns="0" rtlCol="0" anchor="ctr"/>
+          <a:lstStyle/>
+          <a:p>
+            <a:pPr indent="0" marL="0">
+              <a:buNone/>
+            </a:pPr>
+            <a:r>
+              <a:rPr lang="en-US" sz="1500" dirty="0">
+                <a:solidFill>
+                  <a:srgbClr val="14181F"/>
+                </a:solidFill>
+                <a:latin typeface="Calibri" pitchFamily="34" charset="0"/>
+                <a:ea typeface="Calibri" pitchFamily="34" charset="-122"/>
+                <a:cs typeface="Calibri" pitchFamily="34" charset="-120"/>
+              </a:rPr>
+              <a:t>Mọi con số sinh ra từ một phép đo có file trong repo, không có số nào gõ tay.</a:t>
+            </a:r>
+            <a:endParaRPr lang="en-US" sz="1500" dirty="0"/>
+          </a:p>
+        </p:txBody>
+      </p:sp>
+      <p:sp>
+        <p:nvSpPr>
+          <p:cNvPr id="21" name="Text 19"/>
+          <p:cNvSpPr/>
+          <p:nvPr/>
+        </p:nvSpPr>
+        <p:spPr>
+          <a:xfrm>
+            <a:off x="685800" y="4974336"/>
+            <a:ext cx="10820095" cy="365760"/>
+          </a:xfrm>
+          <a:prstGeom prst="rect">
+            <a:avLst/>
+          </a:prstGeom>
+          <a:noFill/>
+          <a:ln/>
+        </p:spPr>
+        <p:txBody>
+          <a:bodyPr wrap="square" lIns="0" tIns="0" rIns="0" bIns="0" rtlCol="0" anchor="ctr"/>
+          <a:lstStyle/>
+          <a:p>
+            <a:pPr indent="0" marL="0">
+              <a:buNone/>
+            </a:pPr>
+            <a:r>
+              <a:rPr lang="en-US" sz="1200" dirty="0">
+                <a:solidFill>
+                  <a:srgbClr val="B45309"/>
+                </a:solidFill>
+                <a:latin typeface="Consolas" pitchFamily="34" charset="0"/>
+                <a:ea typeface="Consolas" pitchFamily="34" charset="-122"/>
+                <a:cs typeface="Consolas" pitchFamily="34" charset="-120"/>
+              </a:rPr>
+              <a:t>neitln.github.io/Custos-Solana/so-lieu.html  —  mỗi con số kèm cách đo và ngày đo</a:t>
+            </a:r>
+            <a:endParaRPr lang="en-US" sz="1200" dirty="0"/>
+          </a:p>
+        </p:txBody>
+      </p:sp>
+      <p:sp>
+        <p:nvSpPr>
+          <p:cNvPr id="22" name="Text 20"/>
+          <p:cNvSpPr/>
+          <p:nvPr/>
+        </p:nvSpPr>
+        <p:spPr>
+          <a:xfrm>
+            <a:off x="685800" y="5413248"/>
+            <a:ext cx="10820095" cy="384048"/>
+          </a:xfrm>
+          <a:prstGeom prst="rect">
+            <a:avLst/>
+          </a:prstGeom>
+          <a:noFill/>
+          <a:ln/>
+        </p:spPr>
+        <p:txBody>
+          <a:bodyPr wrap="square" lIns="0" tIns="0" rIns="0" bIns="0" rtlCol="0" anchor="ctr"/>
+          <a:lstStyle/>
+          <a:p>
+            <a:pPr indent="0" marL="0">
+              <a:buNone/>
+            </a:pPr>
+            <a:r>
+              <a:rPr lang="en-US" sz="1300" i="1" dirty="0">
+                <a:solidFill>
+                  <a:srgbClr val="5E6673"/>
+                </a:solidFill>
+                <a:latin typeface="Calibri" pitchFamily="34" charset="0"/>
+                <a:ea typeface="Calibri" pitchFamily="34" charset="-122"/>
+                <a:cs typeface="Calibri" pitchFamily="34" charset="-120"/>
+              </a:rPr>
+              <a:t>Đã hỏi 20 người (29/08 và 30/08/2026): 13/20 nêu được hậu quả · 4/20 vẫn ký. Chưa ví/dApp nào cam kết tích hợp.</a:t>
+            </a:r>
+            <a:endParaRPr lang="en-US" sz="1300" dirty="0"/>
+          </a:p>
+        </p:txBody>
+      </p:sp>
+    </p:spTree>
+  </p:cSld>
+  <p:clrMapOvr>
+    <a:masterClrMapping/>
+  </p:clrMapOvr>
+</p:sld>
+</file>
+
+<file path=ppt/slides/slide11.xml><?xml version="1.0" encoding="utf-8"?>
+<p:sld xmlns:a="http://schemas.openxmlformats.org/drawingml/2006/main" xmlns:r="http://schemas.openxmlformats.org/officeDocument/2006/relationships" xmlns:p="http://schemas.openxmlformats.org/presentationml/2006/main">
+  <p:cSld name="Slide 11">
+    <p:bg>
+      <p:bgPr>
+        <a:solidFill>
           <a:srgbClr val="EFEDE6"/>
         </a:solidFill>
       </p:bgPr>
@@ -4916,7 +5816,7 @@
                 <a:ea typeface="Trebuchet MS" pitchFamily="34" charset="-122"/>
                 <a:cs typeface="Trebuchet MS" pitchFamily="34" charset="-120"/>
               </a:rPr>
-              <a:t>AI làm gì, và tuyệt đối không được làm gì</a:t>
+              <a:t>Bán gì được, khi SDK là mã nguồn mở</a:t>
             </a:r>
             <a:endParaRPr lang="en-US" sz="3400" dirty="0"/>
           </a:p>
@@ -4931,77 +5831,11 @@
         <p:spPr>
           <a:xfrm>
             <a:off x="685800" y="1874520"/>
-            <a:ext cx="10820095" cy="1234440"/>
+            <a:ext cx="5158588" cy="2286000"/>
           </a:xfrm>
           <a:prstGeom prst="roundRect">
             <a:avLst>
-              <a:gd name="adj" fmla="val 6667"/>
-            </a:avLst>
-          </a:prstGeom>
-          <a:solidFill>
-            <a:srgbClr val="FDF2F4"/>
-          </a:solidFill>
-          <a:ln w="12700">
-            <a:solidFill>
-              <a:srgbClr val="E11D48"/>
-            </a:solidFill>
-            <a:prstDash val="solid"/>
-          </a:ln>
-        </p:spPr>
-      </p:sp>
-      <p:sp>
-        <p:nvSpPr>
-          <p:cNvPr id="5" name="Text 3"/>
-          <p:cNvSpPr/>
-          <p:nvPr/>
-        </p:nvSpPr>
-        <p:spPr>
-          <a:xfrm>
-            <a:off x="1051560" y="1874520"/>
-            <a:ext cx="10088575" cy="1234440"/>
-          </a:xfrm>
-          <a:prstGeom prst="rect">
-            <a:avLst/>
-          </a:prstGeom>
-          <a:noFill/>
-          <a:ln/>
-        </p:spPr>
-        <p:txBody>
-          <a:bodyPr wrap="square" lIns="0" tIns="0" rIns="0" bIns="0" rtlCol="0" anchor="ctr"/>
-          <a:lstStyle/>
-          <a:p>
-            <a:pPr indent="0" marL="0">
-              <a:buNone/>
-            </a:pPr>
-            <a:r>
-              <a:rPr lang="en-US" sz="2100" b="1" dirty="0">
-                <a:solidFill>
-                  <a:srgbClr val="14181F"/>
-                </a:solidFill>
-                <a:latin typeface="Trebuchet MS" pitchFamily="34" charset="0"/>
-                <a:ea typeface="Trebuchet MS" pitchFamily="34" charset="-122"/>
-                <a:cs typeface="Trebuchet MS" pitchFamily="34" charset="-120"/>
-              </a:rPr>
-              <a:t>AI không được xác nhận giao dịch an toàn, cũng không được kết luận giao dịch nguy hiểm.</a:t>
-            </a:r>
-            <a:endParaRPr lang="en-US" sz="2100" dirty="0"/>
-          </a:p>
-        </p:txBody>
-      </p:sp>
-      <p:sp>
-        <p:nvSpPr>
-          <p:cNvPr id="6" name="Shape 4"/>
-          <p:cNvSpPr/>
-          <p:nvPr/>
-        </p:nvSpPr>
-        <p:spPr>
-          <a:xfrm>
-            <a:off x="685800" y="3337560"/>
-            <a:ext cx="5158588" cy="1783080"/>
-          </a:xfrm>
-          <a:prstGeom prst="roundRect">
-            <a:avLst>
-              <a:gd name="adj" fmla="val 4615"/>
+              <a:gd name="adj" fmla="val 3600"/>
             </a:avLst>
           </a:prstGeom>
           <a:solidFill>
@@ -5017,13 +5851,13 @@
       </p:sp>
       <p:sp>
         <p:nvSpPr>
-          <p:cNvPr id="7" name="Text 5"/>
-          <p:cNvSpPr/>
-          <p:nvPr/>
-        </p:nvSpPr>
-        <p:spPr>
-          <a:xfrm>
-            <a:off x="1005840" y="3547872"/>
+          <p:cNvPr id="5" name="Text 3"/>
+          <p:cNvSpPr/>
+          <p:nvPr/>
+        </p:nvSpPr>
+        <p:spPr>
+          <a:xfrm>
+            <a:off x="1005840" y="2103120"/>
             <a:ext cx="4518508" cy="292608"/>
           </a:xfrm>
           <a:prstGeom prst="rect">
@@ -5042,13 +5876,13 @@
             <a:r>
               <a:rPr lang="en-US" sz="1050" b="1" spc="120" kern="0" dirty="0">
                 <a:solidFill>
-                  <a:srgbClr val="047857"/>
+                  <a:srgbClr val="5E6673"/>
                 </a:solidFill>
                 <a:latin typeface="Consolas" pitchFamily="34" charset="0"/>
                 <a:ea typeface="Consolas" pitchFamily="34" charset="-122"/>
                 <a:cs typeface="Consolas" pitchFamily="34" charset="-120"/>
               </a:rPr>
-              <a:t>ENGINE LUẬT  ·  14 LUẬT XÁC ĐỊNH</a:t>
+              <a:t>MIỄN PHÍ — MIT, FORK ĐƯỢC</a:t>
             </a:r>
             <a:endParaRPr lang="en-US" sz="1050" dirty="0"/>
           </a:p>
@@ -5056,40 +5890,129 @@
       </p:sp>
       <p:sp>
         <p:nvSpPr>
+          <p:cNvPr id="6" name="Text 4"/>
+          <p:cNvSpPr/>
+          <p:nvPr/>
+        </p:nvSpPr>
+        <p:spPr>
+          <a:xfrm>
+            <a:off x="1005840" y="2514600"/>
+            <a:ext cx="4518508" cy="1371600"/>
+          </a:xfrm>
+          <a:prstGeom prst="rect">
+            <a:avLst/>
+          </a:prstGeom>
+          <a:noFill/>
+          <a:ln/>
+        </p:spPr>
+        <p:txBody>
+          <a:bodyPr wrap="square" lIns="0" tIns="0" rIns="0" bIns="0" rtlCol="0" anchor="ctr"/>
+          <a:lstStyle/>
+          <a:p>
+            <a:pPr indent="0" marL="0">
+              <a:lnSpc>
+                <a:spcPts val="2600"/>
+              </a:lnSpc>
+              <a:buNone/>
+            </a:pPr>
+            <a:r>
+              <a:rPr lang="en-US" sz="1500" dirty="0">
+                <a:solidFill>
+                  <a:srgbClr val="14181F"/>
+                </a:solidFill>
+                <a:latin typeface="Calibri" pitchFamily="34" charset="0"/>
+                <a:ea typeface="Calibri" pitchFamily="34" charset="-122"/>
+                <a:cs typeface="Calibri" pitchFamily="34" charset="-120"/>
+              </a:rPr>
+              <a:t>SDK · 14 luật · lớp neo AI</a:t>
+            </a:r>
+            <a:endParaRPr lang="en-US" sz="1500" dirty="0"/>
+          </a:p>
+          <a:p>
+            <a:pPr indent="0" marL="0">
+              <a:lnSpc>
+                <a:spcPts val="2600"/>
+              </a:lnSpc>
+              <a:buNone/>
+            </a:pPr>
+            <a:r>
+              <a:rPr lang="en-US" sz="1500" dirty="0">
+                <a:solidFill>
+                  <a:srgbClr val="14181F"/>
+                </a:solidFill>
+                <a:latin typeface="Calibri" pitchFamily="34" charset="0"/>
+                <a:ea typeface="Calibri" pitchFamily="34" charset="-122"/>
+                <a:cs typeface="Calibri" pitchFamily="34" charset="-120"/>
+              </a:rPr>
+              <a:t>Tự host, tự sửa, tự chịu</a:t>
+            </a:r>
+            <a:endParaRPr lang="en-US" sz="1500" dirty="0"/>
+          </a:p>
+        </p:txBody>
+      </p:sp>
+      <p:sp>
+        <p:nvSpPr>
+          <p:cNvPr id="7" name="Shape 5"/>
+          <p:cNvSpPr/>
+          <p:nvPr/>
+        </p:nvSpPr>
+        <p:spPr>
+          <a:xfrm>
+            <a:off x="6347308" y="1874520"/>
+            <a:ext cx="5158588" cy="2286000"/>
+          </a:xfrm>
+          <a:prstGeom prst="roundRect">
+            <a:avLst>
+              <a:gd name="adj" fmla="val 3600"/>
+            </a:avLst>
+          </a:prstGeom>
+          <a:solidFill>
+            <a:srgbClr val="FDF3E3"/>
+          </a:solidFill>
+          <a:ln w="12700">
+            <a:solidFill>
+              <a:srgbClr val="F5A524"/>
+            </a:solidFill>
+            <a:prstDash val="solid"/>
+          </a:ln>
+        </p:spPr>
+      </p:sp>
+      <p:sp>
+        <p:nvSpPr>
           <p:cNvPr id="8" name="Text 6"/>
           <p:cNvSpPr/>
           <p:nvPr/>
         </p:nvSpPr>
         <p:spPr>
           <a:xfrm>
-            <a:off x="1005840" y="3913632"/>
-            <a:ext cx="4518508" cy="365760"/>
-          </a:xfrm>
-          <a:prstGeom prst="rect">
-            <a:avLst/>
-          </a:prstGeom>
-          <a:noFill/>
-          <a:ln/>
-        </p:spPr>
-        <p:txBody>
-          <a:bodyPr wrap="square" lIns="0" tIns="0" rIns="0" bIns="0" rtlCol="0" anchor="ctr"/>
-          <a:lstStyle/>
-          <a:p>
-            <a:pPr indent="0" marL="0">
-              <a:buNone/>
-            </a:pPr>
-            <a:r>
-              <a:rPr lang="en-US" sz="1400" dirty="0">
-                <a:solidFill>
-                  <a:srgbClr val="14181F"/>
+            <a:off x="6667348" y="2103120"/>
+            <a:ext cx="4518508" cy="292608"/>
+          </a:xfrm>
+          <a:prstGeom prst="rect">
+            <a:avLst/>
+          </a:prstGeom>
+          <a:noFill/>
+          <a:ln/>
+        </p:spPr>
+        <p:txBody>
+          <a:bodyPr wrap="square" lIns="0" tIns="0" rIns="0" bIns="0" rtlCol="0" anchor="ctr"/>
+          <a:lstStyle/>
+          <a:p>
+            <a:pPr algn="l" indent="0" marL="0">
+              <a:buNone/>
+            </a:pPr>
+            <a:r>
+              <a:rPr lang="en-US" sz="1050" b="1" spc="120" kern="0" dirty="0">
+                <a:solidFill>
+                  <a:srgbClr val="B45309"/>
                 </a:solidFill>
                 <a:latin typeface="Consolas" pitchFamily="34" charset="0"/>
                 <a:ea typeface="Consolas" pitchFamily="34" charset="-122"/>
                 <a:cs typeface="Consolas" pitchFamily="34" charset="-120"/>
               </a:rPr>
-              <a:t>level: safe | warning | danger</a:t>
-            </a:r>
-            <a:endParaRPr lang="en-US" sz="1400" dirty="0"/>
+              <a:t>TRẢ TIỀN — KHÔNG FORK ĐƯỢC</a:t>
+            </a:r>
+            <a:endParaRPr lang="en-US" sz="1050" dirty="0"/>
           </a:p>
         </p:txBody>
       </p:sp>
@@ -5101,8 +6024,8 @@
         </p:nvSpPr>
         <p:spPr>
           <a:xfrm>
-            <a:off x="1005840" y="4315968"/>
-            <a:ext cx="4518508" cy="640080"/>
+            <a:off x="6667348" y="2514600"/>
+            <a:ext cx="4518508" cy="1371600"/>
           </a:xfrm>
           <a:prstGeom prst="rect">
             <a:avLst/>
@@ -5116,22 +6039,62 @@
           <a:p>
             <a:pPr indent="0" marL="0">
               <a:lnSpc>
-                <a:spcPts val="2000"/>
+                <a:spcPts val="2600"/>
               </a:lnSpc>
               <a:buNone/>
             </a:pPr>
             <a:r>
-              <a:rPr lang="en-US" sz="1400" dirty="0">
-                <a:solidFill>
-                  <a:srgbClr val="525A66"/>
+              <a:rPr lang="en-US" sz="1500" dirty="0">
+                <a:solidFill>
+                  <a:srgbClr val="14181F"/>
                 </a:solidFill>
                 <a:latin typeface="Calibri" pitchFamily="34" charset="0"/>
                 <a:ea typeface="Calibri" pitchFamily="34" charset="-122"/>
                 <a:cs typeface="Calibri" pitchFamily="34" charset="-120"/>
               </a:rPr>
-              <a:t>Quyết định mức cảnh báo. AI không chạm vào trường này.</a:t>
-            </a:r>
-            <a:endParaRPr lang="en-US" sz="1400" dirty="0"/>
+              <a:t>Luật mới khi Solana đổi</a:t>
+            </a:r>
+            <a:endParaRPr lang="en-US" sz="1500" dirty="0"/>
+          </a:p>
+          <a:p>
+            <a:pPr indent="0" marL="0">
+              <a:lnSpc>
+                <a:spcPts val="2600"/>
+              </a:lnSpc>
+              <a:buNone/>
+            </a:pPr>
+            <a:r>
+              <a:rPr lang="en-US" sz="1500" dirty="0">
+                <a:solidFill>
+                  <a:srgbClr val="14181F"/>
+                </a:solidFill>
+                <a:latin typeface="Calibri" pitchFamily="34" charset="0"/>
+                <a:ea typeface="Calibri" pitchFamily="34" charset="-122"/>
+                <a:cs typeface="Calibri" pitchFamily="34" charset="-120"/>
+              </a:rPr>
+              <a:t>Decoder cho chương trình riêng</a:t>
+            </a:r>
+            <a:endParaRPr lang="en-US" sz="1500" dirty="0"/>
+          </a:p>
+          <a:p>
+            <a:pPr indent="0" marL="0">
+              <a:lnSpc>
+                <a:spcPts val="2600"/>
+              </a:lnSpc>
+              <a:buNone/>
+            </a:pPr>
+            <a:r>
+              <a:rPr lang="en-US" sz="1500" dirty="0">
+                <a:solidFill>
+                  <a:srgbClr val="14181F"/>
+                </a:solidFill>
+                <a:latin typeface="Calibri" pitchFamily="34" charset="0"/>
+                <a:ea typeface="Calibri" pitchFamily="34" charset="-122"/>
+                <a:cs typeface="Calibri" pitchFamily="34" charset="-120"/>
+              </a:rPr>
+              <a:t>Có người trả lời khi tích hợp</a:t>
+            </a:r>
+            <a:endParaRPr lang="en-US" sz="1500" dirty="0"/>
           </a:p>
         </p:txBody>
       </p:sp>
@@ -5143,12 +6106,12 @@
         </p:nvSpPr>
         <p:spPr>
           <a:xfrm>
-            <a:off x="6347308" y="3337560"/>
-            <a:ext cx="5158588" cy="1783080"/>
+            <a:off x="685800" y="4297680"/>
+            <a:ext cx="10820095" cy="868680"/>
           </a:xfrm>
           <a:prstGeom prst="roundRect">
             <a:avLst>
-              <a:gd name="adj" fmla="val 4615"/>
+              <a:gd name="adj" fmla="val 9474"/>
             </a:avLst>
           </a:prstGeom>
           <a:solidFill>
@@ -5170,121 +6133,40 @@
         </p:nvSpPr>
         <p:spPr>
           <a:xfrm>
-            <a:off x="6667348" y="3547872"/>
-            <a:ext cx="4518508" cy="292608"/>
-          </a:xfrm>
-          <a:prstGeom prst="rect">
-            <a:avLst/>
-          </a:prstGeom>
-          <a:noFill/>
-          <a:ln/>
-        </p:spPr>
-        <p:txBody>
-          <a:bodyPr wrap="square" lIns="0" tIns="0" rIns="0" bIns="0" rtlCol="0" anchor="ctr"/>
-          <a:lstStyle/>
-          <a:p>
-            <a:pPr algn="l" indent="0" marL="0">
-              <a:buNone/>
-            </a:pPr>
-            <a:r>
-              <a:rPr lang="en-US" sz="1050" b="1" spc="120" kern="0" dirty="0">
-                <a:solidFill>
-                  <a:srgbClr val="4338CA"/>
-                </a:solidFill>
-                <a:latin typeface="Consolas" pitchFamily="34" charset="0"/>
-                <a:ea typeface="Consolas" pitchFamily="34" charset="-122"/>
-                <a:cs typeface="Consolas" pitchFamily="34" charset="-120"/>
-              </a:rPr>
-              <a:t>AI  ·  TRƯỜNG RIÊNG</a:t>
-            </a:r>
-            <a:endParaRPr lang="en-US" sz="1050" dirty="0"/>
-          </a:p>
-        </p:txBody>
-      </p:sp>
-      <p:sp>
-        <p:nvSpPr>
-          <p:cNvPr id="12" name="Text 10"/>
-          <p:cNvSpPr/>
-          <p:nvPr/>
-        </p:nvSpPr>
-        <p:spPr>
-          <a:xfrm>
-            <a:off x="6667348" y="3913632"/>
-            <a:ext cx="4518508" cy="365760"/>
-          </a:xfrm>
-          <a:prstGeom prst="rect">
-            <a:avLst/>
-          </a:prstGeom>
-          <a:noFill/>
-          <a:ln/>
-        </p:spPr>
-        <p:txBody>
-          <a:bodyPr wrap="square" lIns="0" tIns="0" rIns="0" bIns="0" rtlCol="0" anchor="ctr"/>
-          <a:lstStyle/>
-          <a:p>
-            <a:pPr indent="0" marL="0">
-              <a:buNone/>
-            </a:pPr>
-            <a:r>
-              <a:rPr lang="en-US" sz="1400" dirty="0">
+            <a:off x="1051560" y="4297680"/>
+            <a:ext cx="10088575" cy="868680"/>
+          </a:xfrm>
+          <a:prstGeom prst="rect">
+            <a:avLst/>
+          </a:prstGeom>
+          <a:noFill/>
+          <a:ln/>
+        </p:spPr>
+        <p:txBody>
+          <a:bodyPr wrap="square" lIns="0" tIns="0" rIns="0" bIns="0" rtlCol="0" anchor="ctr"/>
+          <a:lstStyle/>
+          <a:p>
+            <a:pPr indent="0" marL="0">
+              <a:buNone/>
+            </a:pPr>
+            <a:r>
+              <a:rPr lang="en-US" sz="1500" dirty="0">
                 <a:solidFill>
                   <a:srgbClr val="14181F"/>
-                </a:solidFill>
-                <a:latin typeface="Consolas" pitchFamily="34" charset="0"/>
-                <a:ea typeface="Consolas" pitchFamily="34" charset="-122"/>
-                <a:cs typeface="Consolas" pitchFamily="34" charset="-120"/>
-              </a:rPr>
-              <a:t>aiAdvisory: review_required</a:t>
-            </a:r>
-            <a:endParaRPr lang="en-US" sz="1400" dirty="0"/>
-          </a:p>
-        </p:txBody>
-      </p:sp>
-      <p:sp>
-        <p:nvSpPr>
-          <p:cNvPr id="13" name="Text 11"/>
-          <p:cNvSpPr/>
-          <p:nvPr/>
-        </p:nvSpPr>
-        <p:spPr>
-          <a:xfrm>
-            <a:off x="6667348" y="4315968"/>
-            <a:ext cx="4518508" cy="640080"/>
-          </a:xfrm>
-          <a:prstGeom prst="rect">
-            <a:avLst/>
-          </a:prstGeom>
-          <a:noFill/>
-          <a:ln/>
-        </p:spPr>
-        <p:txBody>
-          <a:bodyPr wrap="square" lIns="0" tIns="0" rIns="0" bIns="0" rtlCol="0" anchor="ctr"/>
-          <a:lstStyle/>
-          <a:p>
-            <a:pPr indent="0" marL="0">
-              <a:lnSpc>
-                <a:spcPts val="2000"/>
-              </a:lnSpc>
-              <a:buNone/>
-            </a:pPr>
-            <a:r>
-              <a:rPr lang="en-US" sz="1400" dirty="0">
-                <a:solidFill>
-                  <a:srgbClr val="525A66"/>
                 </a:solidFill>
                 <a:latin typeface="Calibri" pitchFamily="34" charset="0"/>
                 <a:ea typeface="Calibri" pitchFamily="34" charset="-122"/>
                 <a:cs typeface="Calibri" pitchFamily="34" charset="-120"/>
               </a:rPr>
-              <a:t>Chỉ được yêu cầu kiểm tra thủ công. AI hỏng thì verdict vẫn còn.</a:t>
-            </a:r>
-            <a:endParaRPr lang="en-US" sz="1400" dirty="0"/>
-          </a:p>
-        </p:txBody>
-      </p:sp>
-      <p:sp>
-        <p:nvSpPr>
-          <p:cNvPr id="14" name="Text 12"/>
+              <a:t>Chi phí biên là GIỜ NGƯỜI, không phải lượt gọi: RPC chỉ $0,0000325 một lượt kiểm tra.</a:t>
+            </a:r>
+            <a:endParaRPr lang="en-US" sz="1500" dirty="0"/>
+          </a:p>
+        </p:txBody>
+      </p:sp>
+      <p:sp>
+        <p:nvSpPr>
+          <p:cNvPr id="12" name="Text 10"/>
           <p:cNvSpPr/>
           <p:nvPr/>
         </p:nvSpPr>
@@ -5307,17 +6189,17 @@
               <a:buNone/>
             </a:pPr>
             <a:r>
-              <a:rPr lang="en-US" sz="1450" i="1" dirty="0">
-                <a:solidFill>
-                  <a:srgbClr val="B45309"/>
+              <a:rPr lang="en-US" sz="1300" i="1" dirty="0">
+                <a:solidFill>
+                  <a:srgbClr val="5E6673"/>
                 </a:solidFill>
                 <a:latin typeface="Calibri" pitchFamily="34" charset="0"/>
                 <a:ea typeface="Calibri" pitchFamily="34" charset="-122"/>
                 <a:cs typeface="Calibri" pitchFamily="34" charset="-120"/>
               </a:rPr>
-              <a:t>Một lớp bảo mật để AI phán “an toàn” là lớp bảo mật sẽ nói dối vào đúng ngày quan trọng nhất.</a:t>
-            </a:r>
-            <a:endParaRPr lang="en-US" sz="1450" dirty="0"/>
+              <a:t>$0 · $49 · $300–800 mỗi tháng — cả ba đều là GIẢ ĐỊNH. Chưa hỏi người mua nào, nên chưa có giá nào được xác nhận.</a:t>
+            </a:r>
+            <a:endParaRPr lang="en-US" sz="1300" dirty="0"/>
           </a:p>
         </p:txBody>
       </p:sp>
@@ -5406,7 +6288,7 @@
                 <a:ea typeface="Trebuchet MS" pitchFamily="34" charset="-122"/>
                 <a:cs typeface="Trebuchet MS" pitchFamily="34" charset="-120"/>
               </a:rPr>
-              <a:t>Con số thật — đo được, truy được nguồn</a:t>
+              <a:t>AI làm gì, và tuyệt đối không được làm gì</a:t>
             </a:r>
             <a:endParaRPr lang="en-US" sz="3400" dirty="0"/>
           </a:p>
@@ -5421,19 +6303,19 @@
         <p:spPr>
           <a:xfrm>
             <a:off x="685800" y="1874520"/>
-            <a:ext cx="2327834" cy="2377440"/>
+            <a:ext cx="10820095" cy="1234440"/>
           </a:xfrm>
           <a:prstGeom prst="roundRect">
             <a:avLst>
-              <a:gd name="adj" fmla="val 3535"/>
+              <a:gd name="adj" fmla="val 6667"/>
             </a:avLst>
           </a:prstGeom>
           <a:solidFill>
-            <a:srgbClr val="FFFFFF"/>
+            <a:srgbClr val="FDF2F4"/>
           </a:solidFill>
           <a:ln w="12700">
             <a:solidFill>
-              <a:srgbClr val="047857"/>
+              <a:srgbClr val="E11D48"/>
             </a:solidFill>
             <a:prstDash val="solid"/>
           </a:ln>
@@ -5447,135 +6329,51 @@
         </p:nvSpPr>
         <p:spPr>
           <a:xfrm>
-            <a:off x="914400" y="2057400"/>
-            <a:ext cx="1870634" cy="868680"/>
-          </a:xfrm>
-          <a:prstGeom prst="rect">
-            <a:avLst/>
-          </a:prstGeom>
-          <a:noFill/>
-          <a:ln/>
-        </p:spPr>
-        <p:txBody>
-          <a:bodyPr wrap="square" lIns="0" tIns="0" rIns="0" bIns="0" rtlCol="0" anchor="ctr"/>
-          <a:lstStyle/>
-          <a:p>
-            <a:pPr indent="0" marL="0">
-              <a:buNone/>
-            </a:pPr>
-            <a:r>
-              <a:rPr lang="en-US" sz="4400" b="1" dirty="0">
-                <a:solidFill>
-                  <a:srgbClr val="047857"/>
+            <a:off x="1051560" y="1874520"/>
+            <a:ext cx="10088575" cy="1234440"/>
+          </a:xfrm>
+          <a:prstGeom prst="rect">
+            <a:avLst/>
+          </a:prstGeom>
+          <a:noFill/>
+          <a:ln/>
+        </p:spPr>
+        <p:txBody>
+          <a:bodyPr wrap="square" lIns="0" tIns="0" rIns="0" bIns="0" rtlCol="0" anchor="ctr"/>
+          <a:lstStyle/>
+          <a:p>
+            <a:pPr indent="0" marL="0">
+              <a:buNone/>
+            </a:pPr>
+            <a:r>
+              <a:rPr lang="en-US" sz="2100" b="1" dirty="0">
+                <a:solidFill>
+                  <a:srgbClr val="14181F"/>
                 </a:solidFill>
                 <a:latin typeface="Trebuchet MS" pitchFamily="34" charset="0"/>
                 <a:ea typeface="Trebuchet MS" pitchFamily="34" charset="-122"/>
                 <a:cs typeface="Trebuchet MS" pitchFamily="34" charset="-120"/>
               </a:rPr>
-              <a:t>0</a:t>
-            </a:r>
-            <a:endParaRPr lang="en-US" sz="4400" dirty="0"/>
-          </a:p>
-        </p:txBody>
-      </p:sp>
-      <p:sp>
-        <p:nvSpPr>
-          <p:cNvPr id="6" name="Text 4"/>
-          <p:cNvSpPr/>
-          <p:nvPr/>
-        </p:nvSpPr>
-        <p:spPr>
-          <a:xfrm>
-            <a:off x="914400" y="2926080"/>
-            <a:ext cx="1870634" cy="548640"/>
-          </a:xfrm>
-          <a:prstGeom prst="rect">
-            <a:avLst/>
-          </a:prstGeom>
-          <a:noFill/>
-          <a:ln/>
-        </p:spPr>
-        <p:txBody>
-          <a:bodyPr wrap="square" lIns="0" tIns="0" rIns="0" bIns="0" rtlCol="0" anchor="ctr"/>
-          <a:lstStyle/>
-          <a:p>
-            <a:pPr indent="0" marL="0">
-              <a:lnSpc>
-                <a:spcPts val="1900"/>
-              </a:lnSpc>
-              <a:buNone/>
-            </a:pPr>
-            <a:r>
-              <a:rPr lang="en-US" sz="1450" dirty="0">
-                <a:solidFill>
-                  <a:srgbClr val="14181F"/>
-                </a:solidFill>
-                <a:latin typeface="Calibri" pitchFamily="34" charset="0"/>
-                <a:ea typeface="Calibri" pitchFamily="34" charset="-122"/>
-                <a:cs typeface="Calibri" pitchFamily="34" charset="-120"/>
-              </a:rPr>
-              <a:t>giao dịch bị CÁO BUỘC</a:t>
-            </a:r>
-            <a:endParaRPr lang="en-US" sz="1450" dirty="0"/>
-          </a:p>
-        </p:txBody>
-      </p:sp>
-      <p:sp>
-        <p:nvSpPr>
-          <p:cNvPr id="7" name="Text 5"/>
-          <p:cNvSpPr/>
-          <p:nvPr/>
-        </p:nvSpPr>
-        <p:spPr>
-          <a:xfrm>
-            <a:off x="914400" y="3493008"/>
-            <a:ext cx="1870634" cy="640080"/>
-          </a:xfrm>
-          <a:prstGeom prst="rect">
-            <a:avLst/>
-          </a:prstGeom>
-          <a:noFill/>
-          <a:ln/>
-        </p:spPr>
-        <p:txBody>
-          <a:bodyPr wrap="square" lIns="0" tIns="0" rIns="0" bIns="0" rtlCol="0" anchor="ctr"/>
-          <a:lstStyle/>
-          <a:p>
-            <a:pPr indent="0" marL="0">
-              <a:lnSpc>
-                <a:spcPts val="1600"/>
-              </a:lnSpc>
-              <a:buNone/>
-            </a:pPr>
-            <a:r>
-              <a:rPr lang="en-US" sz="1100" dirty="0">
-                <a:solidFill>
-                  <a:srgbClr val="5E6673"/>
-                </a:solidFill>
-                <a:latin typeface="Calibri" pitchFamily="34" charset="0"/>
-                <a:ea typeface="Calibri" pitchFamily="34" charset="-122"/>
-                <a:cs typeface="Calibri" pitchFamily="34" charset="-120"/>
-              </a:rPr>
-              <a:t>trên 9 giao dịch SPL công khai đã lưu offline · 7 ở mức Cần xem kỹ · cohort chưa gán nhãn ground truth</a:t>
-            </a:r>
-            <a:endParaRPr lang="en-US" sz="1100" dirty="0"/>
-          </a:p>
-        </p:txBody>
-      </p:sp>
-      <p:sp>
-        <p:nvSpPr>
-          <p:cNvPr id="8" name="Shape 6"/>
-          <p:cNvSpPr/>
-          <p:nvPr/>
-        </p:nvSpPr>
-        <p:spPr>
-          <a:xfrm>
-            <a:off x="3516554" y="1874520"/>
-            <a:ext cx="2327834" cy="2377440"/>
+              <a:t>AI không được xác nhận giao dịch an toàn, cũng không được kết luận giao dịch nguy hiểm.</a:t>
+            </a:r>
+            <a:endParaRPr lang="en-US" sz="2100" dirty="0"/>
+          </a:p>
+        </p:txBody>
+      </p:sp>
+      <p:sp>
+        <p:nvSpPr>
+          <p:cNvPr id="6" name="Shape 4"/>
+          <p:cNvSpPr/>
+          <p:nvPr/>
+        </p:nvSpPr>
+        <p:spPr>
+          <a:xfrm>
+            <a:off x="685800" y="3337560"/>
+            <a:ext cx="5158588" cy="1783080"/>
           </a:xfrm>
           <a:prstGeom prst="roundRect">
             <a:avLst>
-              <a:gd name="adj" fmla="val 3535"/>
+              <a:gd name="adj" fmla="val 4615"/>
             </a:avLst>
           </a:prstGeom>
           <a:solidFill>
@@ -5591,53 +6389,92 @@
       </p:sp>
       <p:sp>
         <p:nvSpPr>
+          <p:cNvPr id="7" name="Text 5"/>
+          <p:cNvSpPr/>
+          <p:nvPr/>
+        </p:nvSpPr>
+        <p:spPr>
+          <a:xfrm>
+            <a:off x="1005840" y="3547872"/>
+            <a:ext cx="4518508" cy="292608"/>
+          </a:xfrm>
+          <a:prstGeom prst="rect">
+            <a:avLst/>
+          </a:prstGeom>
+          <a:noFill/>
+          <a:ln/>
+        </p:spPr>
+        <p:txBody>
+          <a:bodyPr wrap="square" lIns="0" tIns="0" rIns="0" bIns="0" rtlCol="0" anchor="ctr"/>
+          <a:lstStyle/>
+          <a:p>
+            <a:pPr algn="l" indent="0" marL="0">
+              <a:buNone/>
+            </a:pPr>
+            <a:r>
+              <a:rPr lang="en-US" sz="1050" b="1" spc="120" kern="0" dirty="0">
+                <a:solidFill>
+                  <a:srgbClr val="047857"/>
+                </a:solidFill>
+                <a:latin typeface="Consolas" pitchFamily="34" charset="0"/>
+                <a:ea typeface="Consolas" pitchFamily="34" charset="-122"/>
+                <a:cs typeface="Consolas" pitchFamily="34" charset="-120"/>
+              </a:rPr>
+              <a:t>ENGINE LUẬT  ·  14 LUẬT XÁC ĐỊNH</a:t>
+            </a:r>
+            <a:endParaRPr lang="en-US" sz="1050" dirty="0"/>
+          </a:p>
+        </p:txBody>
+      </p:sp>
+      <p:sp>
+        <p:nvSpPr>
+          <p:cNvPr id="8" name="Text 6"/>
+          <p:cNvSpPr/>
+          <p:nvPr/>
+        </p:nvSpPr>
+        <p:spPr>
+          <a:xfrm>
+            <a:off x="1005840" y="3913632"/>
+            <a:ext cx="4518508" cy="365760"/>
+          </a:xfrm>
+          <a:prstGeom prst="rect">
+            <a:avLst/>
+          </a:prstGeom>
+          <a:noFill/>
+          <a:ln/>
+        </p:spPr>
+        <p:txBody>
+          <a:bodyPr wrap="square" lIns="0" tIns="0" rIns="0" bIns="0" rtlCol="0" anchor="ctr"/>
+          <a:lstStyle/>
+          <a:p>
+            <a:pPr indent="0" marL="0">
+              <a:buNone/>
+            </a:pPr>
+            <a:r>
+              <a:rPr lang="en-US" sz="1400" dirty="0">
+                <a:solidFill>
+                  <a:srgbClr val="14181F"/>
+                </a:solidFill>
+                <a:latin typeface="Consolas" pitchFamily="34" charset="0"/>
+                <a:ea typeface="Consolas" pitchFamily="34" charset="-122"/>
+                <a:cs typeface="Consolas" pitchFamily="34" charset="-120"/>
+              </a:rPr>
+              <a:t>level: safe | warning | danger</a:t>
+            </a:r>
+            <a:endParaRPr lang="en-US" sz="1400" dirty="0"/>
+          </a:p>
+        </p:txBody>
+      </p:sp>
+      <p:sp>
+        <p:nvSpPr>
           <p:cNvPr id="9" name="Text 7"/>
           <p:cNvSpPr/>
           <p:nvPr/>
         </p:nvSpPr>
         <p:spPr>
           <a:xfrm>
-            <a:off x="3745154" y="2057400"/>
-            <a:ext cx="1870634" cy="868680"/>
-          </a:xfrm>
-          <a:prstGeom prst="rect">
-            <a:avLst/>
-          </a:prstGeom>
-          <a:noFill/>
-          <a:ln/>
-        </p:spPr>
-        <p:txBody>
-          <a:bodyPr wrap="square" lIns="0" tIns="0" rIns="0" bIns="0" rtlCol="0" anchor="ctr"/>
-          <a:lstStyle/>
-          <a:p>
-            <a:pPr indent="0" marL="0">
-              <a:buNone/>
-            </a:pPr>
-            <a:r>
-              <a:rPr lang="en-US" sz="4400" b="1" dirty="0">
-                <a:solidFill>
-                  <a:srgbClr val="14181F"/>
-                </a:solidFill>
-                <a:latin typeface="Trebuchet MS" pitchFamily="34" charset="0"/>
-                <a:ea typeface="Trebuchet MS" pitchFamily="34" charset="-122"/>
-                <a:cs typeface="Trebuchet MS" pitchFamily="34" charset="-120"/>
-              </a:rPr>
-              <a:t>467</a:t>
-            </a:r>
-            <a:endParaRPr lang="en-US" sz="4400" dirty="0"/>
-          </a:p>
-        </p:txBody>
-      </p:sp>
-      <p:sp>
-        <p:nvSpPr>
-          <p:cNvPr id="10" name="Text 8"/>
-          <p:cNvSpPr/>
-          <p:nvPr/>
-        </p:nvSpPr>
-        <p:spPr>
-          <a:xfrm>
-            <a:off x="3745154" y="2926080"/>
-            <a:ext cx="1870634" cy="548640"/>
+            <a:off x="1005840" y="4315968"/>
+            <a:ext cx="4518508" cy="640080"/>
           </a:xfrm>
           <a:prstGeom prst="rect">
             <a:avLst/>
@@ -5651,81 +6488,39 @@
           <a:p>
             <a:pPr indent="0" marL="0">
               <a:lnSpc>
-                <a:spcPts val="1900"/>
+                <a:spcPts val="2000"/>
               </a:lnSpc>
               <a:buNone/>
             </a:pPr>
             <a:r>
-              <a:rPr lang="en-US" sz="1450" dirty="0">
-                <a:solidFill>
-                  <a:srgbClr val="14181F"/>
+              <a:rPr lang="en-US" sz="1400" dirty="0">
+                <a:solidFill>
+                  <a:srgbClr val="525A66"/>
                 </a:solidFill>
                 <a:latin typeface="Calibri" pitchFamily="34" charset="0"/>
                 <a:ea typeface="Calibri" pitchFamily="34" charset="-122"/>
                 <a:cs typeface="Calibri" pitchFamily="34" charset="-120"/>
               </a:rPr>
-              <a:t>test tự động</a:t>
-            </a:r>
-            <a:endParaRPr lang="en-US" sz="1450" dirty="0"/>
-          </a:p>
-        </p:txBody>
-      </p:sp>
-      <p:sp>
-        <p:nvSpPr>
-          <p:cNvPr id="11" name="Text 9"/>
-          <p:cNvSpPr/>
-          <p:nvPr/>
-        </p:nvSpPr>
-        <p:spPr>
-          <a:xfrm>
-            <a:off x="3745154" y="3493008"/>
-            <a:ext cx="1870634" cy="640080"/>
-          </a:xfrm>
-          <a:prstGeom prst="rect">
-            <a:avLst/>
-          </a:prstGeom>
-          <a:noFill/>
-          <a:ln/>
-        </p:spPr>
-        <p:txBody>
-          <a:bodyPr wrap="square" lIns="0" tIns="0" rIns="0" bIns="0" rtlCol="0" anchor="ctr"/>
-          <a:lstStyle/>
-          <a:p>
-            <a:pPr indent="0" marL="0">
-              <a:lnSpc>
-                <a:spcPts val="1600"/>
-              </a:lnSpc>
-              <a:buNone/>
-            </a:pPr>
-            <a:r>
-              <a:rPr lang="en-US" sz="1100" dirty="0">
-                <a:solidFill>
-                  <a:srgbClr val="5E6673"/>
-                </a:solidFill>
-                <a:latin typeface="Calibri" pitchFamily="34" charset="0"/>
-                <a:ea typeface="Calibri" pitchFamily="34" charset="-122"/>
-                <a:cs typeface="Calibri" pitchFamily="34" charset="-120"/>
-              </a:rPr>
-              <a:t>chạy lại mỗi lần deploy</a:t>
-            </a:r>
-            <a:endParaRPr lang="en-US" sz="1100" dirty="0"/>
-          </a:p>
-        </p:txBody>
-      </p:sp>
-      <p:sp>
-        <p:nvSpPr>
-          <p:cNvPr id="12" name="Shape 10"/>
-          <p:cNvSpPr/>
-          <p:nvPr/>
-        </p:nvSpPr>
-        <p:spPr>
-          <a:xfrm>
-            <a:off x="6347308" y="1874520"/>
-            <a:ext cx="2327834" cy="2377440"/>
+              <a:t>Quyết định mức cảnh báo. AI không chạm vào trường này.</a:t>
+            </a:r>
+            <a:endParaRPr lang="en-US" sz="1400" dirty="0"/>
+          </a:p>
+        </p:txBody>
+      </p:sp>
+      <p:sp>
+        <p:nvSpPr>
+          <p:cNvPr id="10" name="Shape 8"/>
+          <p:cNvSpPr/>
+          <p:nvPr/>
+        </p:nvSpPr>
+        <p:spPr>
+          <a:xfrm>
+            <a:off x="6347308" y="3337560"/>
+            <a:ext cx="5158588" cy="1783080"/>
           </a:xfrm>
           <a:prstGeom prst="roundRect">
             <a:avLst>
-              <a:gd name="adj" fmla="val 3535"/>
+              <a:gd name="adj" fmla="val 4615"/>
             </a:avLst>
           </a:prstGeom>
           <a:solidFill>
@@ -5741,53 +6536,92 @@
       </p:sp>
       <p:sp>
         <p:nvSpPr>
+          <p:cNvPr id="11" name="Text 9"/>
+          <p:cNvSpPr/>
+          <p:nvPr/>
+        </p:nvSpPr>
+        <p:spPr>
+          <a:xfrm>
+            <a:off x="6667348" y="3547872"/>
+            <a:ext cx="4518508" cy="292608"/>
+          </a:xfrm>
+          <a:prstGeom prst="rect">
+            <a:avLst/>
+          </a:prstGeom>
+          <a:noFill/>
+          <a:ln/>
+        </p:spPr>
+        <p:txBody>
+          <a:bodyPr wrap="square" lIns="0" tIns="0" rIns="0" bIns="0" rtlCol="0" anchor="ctr"/>
+          <a:lstStyle/>
+          <a:p>
+            <a:pPr algn="l" indent="0" marL="0">
+              <a:buNone/>
+            </a:pPr>
+            <a:r>
+              <a:rPr lang="en-US" sz="1050" b="1" spc="120" kern="0" dirty="0">
+                <a:solidFill>
+                  <a:srgbClr val="4338CA"/>
+                </a:solidFill>
+                <a:latin typeface="Consolas" pitchFamily="34" charset="0"/>
+                <a:ea typeface="Consolas" pitchFamily="34" charset="-122"/>
+                <a:cs typeface="Consolas" pitchFamily="34" charset="-120"/>
+              </a:rPr>
+              <a:t>AI  ·  TRƯỜNG RIÊNG</a:t>
+            </a:r>
+            <a:endParaRPr lang="en-US" sz="1050" dirty="0"/>
+          </a:p>
+        </p:txBody>
+      </p:sp>
+      <p:sp>
+        <p:nvSpPr>
+          <p:cNvPr id="12" name="Text 10"/>
+          <p:cNvSpPr/>
+          <p:nvPr/>
+        </p:nvSpPr>
+        <p:spPr>
+          <a:xfrm>
+            <a:off x="6667348" y="3913632"/>
+            <a:ext cx="4518508" cy="365760"/>
+          </a:xfrm>
+          <a:prstGeom prst="rect">
+            <a:avLst/>
+          </a:prstGeom>
+          <a:noFill/>
+          <a:ln/>
+        </p:spPr>
+        <p:txBody>
+          <a:bodyPr wrap="square" lIns="0" tIns="0" rIns="0" bIns="0" rtlCol="0" anchor="ctr"/>
+          <a:lstStyle/>
+          <a:p>
+            <a:pPr indent="0" marL="0">
+              <a:buNone/>
+            </a:pPr>
+            <a:r>
+              <a:rPr lang="en-US" sz="1400" dirty="0">
+                <a:solidFill>
+                  <a:srgbClr val="14181F"/>
+                </a:solidFill>
+                <a:latin typeface="Consolas" pitchFamily="34" charset="0"/>
+                <a:ea typeface="Consolas" pitchFamily="34" charset="-122"/>
+                <a:cs typeface="Consolas" pitchFamily="34" charset="-120"/>
+              </a:rPr>
+              <a:t>aiAdvisory: review_required</a:t>
+            </a:r>
+            <a:endParaRPr lang="en-US" sz="1400" dirty="0"/>
+          </a:p>
+        </p:txBody>
+      </p:sp>
+      <p:sp>
+        <p:nvSpPr>
           <p:cNvPr id="13" name="Text 11"/>
           <p:cNvSpPr/>
           <p:nvPr/>
         </p:nvSpPr>
         <p:spPr>
           <a:xfrm>
-            <a:off x="6575908" y="2057400"/>
-            <a:ext cx="1870634" cy="868680"/>
-          </a:xfrm>
-          <a:prstGeom prst="rect">
-            <a:avLst/>
-          </a:prstGeom>
-          <a:noFill/>
-          <a:ln/>
-        </p:spPr>
-        <p:txBody>
-          <a:bodyPr wrap="square" lIns="0" tIns="0" rIns="0" bIns="0" rtlCol="0" anchor="ctr"/>
-          <a:lstStyle/>
-          <a:p>
-            <a:pPr indent="0" marL="0">
-              <a:buNone/>
-            </a:pPr>
-            <a:r>
-              <a:rPr lang="en-US" sz="4400" b="1" dirty="0">
-                <a:solidFill>
-                  <a:srgbClr val="14181F"/>
-                </a:solidFill>
-                <a:latin typeface="Trebuchet MS" pitchFamily="34" charset="0"/>
-                <a:ea typeface="Trebuchet MS" pitchFamily="34" charset="-122"/>
-                <a:cs typeface="Trebuchet MS" pitchFamily="34" charset="-120"/>
-              </a:rPr>
-              <a:t>14</a:t>
-            </a:r>
-            <a:endParaRPr lang="en-US" sz="4400" dirty="0"/>
-          </a:p>
-        </p:txBody>
-      </p:sp>
-      <p:sp>
-        <p:nvSpPr>
-          <p:cNvPr id="14" name="Text 12"/>
-          <p:cNvSpPr/>
-          <p:nvPr/>
-        </p:nvSpPr>
-        <p:spPr>
-          <a:xfrm>
-            <a:off x="6575908" y="2926080"/>
-            <a:ext cx="1870634" cy="548640"/>
+            <a:off x="6667348" y="4315968"/>
+            <a:ext cx="4518508" cy="640080"/>
           </a:xfrm>
           <a:prstGeom prst="rect">
             <a:avLst/>
@@ -5801,331 +6635,61 @@
           <a:p>
             <a:pPr indent="0" marL="0">
               <a:lnSpc>
-                <a:spcPts val="1900"/>
+                <a:spcPts val="2000"/>
               </a:lnSpc>
               <a:buNone/>
             </a:pPr>
             <a:r>
-              <a:rPr lang="en-US" sz="1450" dirty="0">
-                <a:solidFill>
-                  <a:srgbClr val="14181F"/>
+              <a:rPr lang="en-US" sz="1400" dirty="0">
+                <a:solidFill>
+                  <a:srgbClr val="525A66"/>
                 </a:solidFill>
                 <a:latin typeface="Calibri" pitchFamily="34" charset="0"/>
                 <a:ea typeface="Calibri" pitchFamily="34" charset="-122"/>
                 <a:cs typeface="Calibri" pitchFamily="34" charset="-120"/>
               </a:rPr>
-              <a:t>luật xác định</a:t>
-            </a:r>
-            <a:endParaRPr lang="en-US" sz="1450" dirty="0"/>
-          </a:p>
-        </p:txBody>
-      </p:sp>
-      <p:sp>
-        <p:nvSpPr>
-          <p:cNvPr id="15" name="Text 13"/>
-          <p:cNvSpPr/>
-          <p:nvPr/>
-        </p:nvSpPr>
-        <p:spPr>
-          <a:xfrm>
-            <a:off x="6575908" y="3493008"/>
-            <a:ext cx="1870634" cy="640080"/>
-          </a:xfrm>
-          <a:prstGeom prst="rect">
-            <a:avLst/>
-          </a:prstGeom>
-          <a:noFill/>
-          <a:ln/>
-        </p:spPr>
-        <p:txBody>
-          <a:bodyPr wrap="square" lIns="0" tIns="0" rIns="0" bIns="0" rtlCol="0" anchor="ctr"/>
-          <a:lstStyle/>
-          <a:p>
-            <a:pPr indent="0" marL="0">
-              <a:lnSpc>
-                <a:spcPts val="1600"/>
-              </a:lnSpc>
-              <a:buNone/>
-            </a:pPr>
-            <a:r>
-              <a:rPr lang="en-US" sz="1100" dirty="0">
-                <a:solidFill>
-                  <a:srgbClr val="5E6673"/>
+              <a:t>Chỉ được yêu cầu kiểm tra thủ công. AI hỏng thì verdict vẫn còn.</a:t>
+            </a:r>
+            <a:endParaRPr lang="en-US" sz="1400" dirty="0"/>
+          </a:p>
+        </p:txBody>
+      </p:sp>
+      <p:sp>
+        <p:nvSpPr>
+          <p:cNvPr id="14" name="Text 12"/>
+          <p:cNvSpPr/>
+          <p:nvPr/>
+        </p:nvSpPr>
+        <p:spPr>
+          <a:xfrm>
+            <a:off x="685800" y="5349240"/>
+            <a:ext cx="10820095" cy="411480"/>
+          </a:xfrm>
+          <a:prstGeom prst="rect">
+            <a:avLst/>
+          </a:prstGeom>
+          <a:noFill/>
+          <a:ln/>
+        </p:spPr>
+        <p:txBody>
+          <a:bodyPr wrap="square" lIns="0" tIns="0" rIns="0" bIns="0" rtlCol="0" anchor="ctr"/>
+          <a:lstStyle/>
+          <a:p>
+            <a:pPr indent="0" marL="0">
+              <a:buNone/>
+            </a:pPr>
+            <a:r>
+              <a:rPr lang="en-US" sz="1450" i="1" dirty="0">
+                <a:solidFill>
+                  <a:srgbClr val="B45309"/>
                 </a:solidFill>
                 <a:latin typeface="Calibri" pitchFamily="34" charset="0"/>
                 <a:ea typeface="Calibri" pitchFamily="34" charset="-122"/>
                 <a:cs typeface="Calibri" pitchFamily="34" charset="-120"/>
               </a:rPr>
-              <a:t>38 mẫu kiểm thử</a:t>
-            </a:r>
-            <a:endParaRPr lang="en-US" sz="1100" dirty="0"/>
-          </a:p>
-        </p:txBody>
-      </p:sp>
-      <p:sp>
-        <p:nvSpPr>
-          <p:cNvPr id="16" name="Shape 14"/>
-          <p:cNvSpPr/>
-          <p:nvPr/>
-        </p:nvSpPr>
-        <p:spPr>
-          <a:xfrm>
-            <a:off x="9178061" y="1874520"/>
-            <a:ext cx="2327834" cy="2377440"/>
-          </a:xfrm>
-          <a:prstGeom prst="roundRect">
-            <a:avLst>
-              <a:gd name="adj" fmla="val 3535"/>
-            </a:avLst>
-          </a:prstGeom>
-          <a:solidFill>
-            <a:srgbClr val="FFFFFF"/>
-          </a:solidFill>
-          <a:ln w="12700">
-            <a:solidFill>
-              <a:srgbClr val="DCD9D0"/>
-            </a:solidFill>
-            <a:prstDash val="solid"/>
-          </a:ln>
-        </p:spPr>
-      </p:sp>
-      <p:sp>
-        <p:nvSpPr>
-          <p:cNvPr id="17" name="Text 15"/>
-          <p:cNvSpPr/>
-          <p:nvPr/>
-        </p:nvSpPr>
-        <p:spPr>
-          <a:xfrm>
-            <a:off x="9406661" y="2057400"/>
-            <a:ext cx="1870634" cy="868680"/>
-          </a:xfrm>
-          <a:prstGeom prst="rect">
-            <a:avLst/>
-          </a:prstGeom>
-          <a:noFill/>
-          <a:ln/>
-        </p:spPr>
-        <p:txBody>
-          <a:bodyPr wrap="square" lIns="0" tIns="0" rIns="0" bIns="0" rtlCol="0" anchor="ctr"/>
-          <a:lstStyle/>
-          <a:p>
-            <a:pPr indent="0" marL="0">
-              <a:buNone/>
-            </a:pPr>
-            <a:r>
-              <a:rPr lang="en-US" sz="4400" b="1" dirty="0">
-                <a:solidFill>
-                  <a:srgbClr val="B45309"/>
-                </a:solidFill>
-                <a:latin typeface="Trebuchet MS" pitchFamily="34" charset="0"/>
-                <a:ea typeface="Trebuchet MS" pitchFamily="34" charset="-122"/>
-                <a:cs typeface="Trebuchet MS" pitchFamily="34" charset="-120"/>
-              </a:rPr>
-              <a:t>82%</a:t>
-            </a:r>
-            <a:endParaRPr lang="en-US" sz="4400" dirty="0"/>
-          </a:p>
-        </p:txBody>
-      </p:sp>
-      <p:sp>
-        <p:nvSpPr>
-          <p:cNvPr id="18" name="Text 16"/>
-          <p:cNvSpPr/>
-          <p:nvPr/>
-        </p:nvSpPr>
-        <p:spPr>
-          <a:xfrm>
-            <a:off x="9406661" y="2926080"/>
-            <a:ext cx="1870634" cy="548640"/>
-          </a:xfrm>
-          <a:prstGeom prst="rect">
-            <a:avLst/>
-          </a:prstGeom>
-          <a:noFill/>
-          <a:ln/>
-        </p:spPr>
-        <p:txBody>
-          <a:bodyPr wrap="square" lIns="0" tIns="0" rIns="0" bIns="0" rtlCol="0" anchor="ctr"/>
-          <a:lstStyle/>
-          <a:p>
-            <a:pPr indent="0" marL="0">
-              <a:lnSpc>
-                <a:spcPts val="1900"/>
-              </a:lnSpc>
-              <a:buNone/>
-            </a:pPr>
-            <a:r>
-              <a:rPr lang="en-US" sz="1450" dirty="0">
-                <a:solidFill>
-                  <a:srgbClr val="14181F"/>
-                </a:solidFill>
-                <a:latin typeface="Calibri" pitchFamily="34" charset="0"/>
-                <a:ea typeface="Calibri" pitchFamily="34" charset="-122"/>
-                <a:cs typeface="Calibri" pitchFamily="34" charset="-120"/>
-              </a:rPr>
-              <a:t>lệnh đọc hiểu được</a:t>
+              <a:t>Một lớp bảo mật để AI phán “an toàn” là lớp bảo mật sẽ nói dối vào đúng ngày quan trọng nhất.</a:t>
             </a:r>
             <a:endParaRPr lang="en-US" sz="1450" dirty="0"/>
-          </a:p>
-        </p:txBody>
-      </p:sp>
-      <p:sp>
-        <p:nvSpPr>
-          <p:cNvPr id="19" name="Text 17"/>
-          <p:cNvSpPr/>
-          <p:nvPr/>
-        </p:nvSpPr>
-        <p:spPr>
-          <a:xfrm>
-            <a:off x="9406661" y="3493008"/>
-            <a:ext cx="1870634" cy="640080"/>
-          </a:xfrm>
-          <a:prstGeom prst="rect">
-            <a:avLst/>
-          </a:prstGeom>
-          <a:noFill/>
-          <a:ln/>
-        </p:spPr>
-        <p:txBody>
-          <a:bodyPr wrap="square" lIns="0" tIns="0" rIns="0" bIns="0" rtlCol="0" anchor="ctr"/>
-          <a:lstStyle/>
-          <a:p>
-            <a:pPr indent="0" marL="0">
-              <a:lnSpc>
-                <a:spcPts val="1600"/>
-              </a:lnSpc>
-              <a:buNone/>
-            </a:pPr>
-            <a:r>
-              <a:rPr lang="en-US" sz="1100" dirty="0">
-                <a:solidFill>
-                  <a:srgbClr val="5E6673"/>
-                </a:solidFill>
-                <a:latin typeface="Calibri" pitchFamily="34" charset="0"/>
-                <a:ea typeface="Calibri" pitchFamily="34" charset="-122"/>
-                <a:cs typeface="Calibri" pitchFamily="34" charset="-120"/>
-              </a:rPr>
-              <a:t>phần còn lại KHÔNG đoán</a:t>
-            </a:r>
-            <a:endParaRPr lang="en-US" sz="1100" dirty="0"/>
-          </a:p>
-        </p:txBody>
-      </p:sp>
-      <p:sp>
-        <p:nvSpPr>
-          <p:cNvPr id="20" name="Text 18"/>
-          <p:cNvSpPr/>
-          <p:nvPr/>
-        </p:nvSpPr>
-        <p:spPr>
-          <a:xfrm>
-            <a:off x="685800" y="4572000"/>
-            <a:ext cx="10820095" cy="384048"/>
-          </a:xfrm>
-          <a:prstGeom prst="rect">
-            <a:avLst/>
-          </a:prstGeom>
-          <a:noFill/>
-          <a:ln/>
-        </p:spPr>
-        <p:txBody>
-          <a:bodyPr wrap="square" lIns="0" tIns="0" rIns="0" bIns="0" rtlCol="0" anchor="ctr"/>
-          <a:lstStyle/>
-          <a:p>
-            <a:pPr indent="0" marL="0">
-              <a:buNone/>
-            </a:pPr>
-            <a:r>
-              <a:rPr lang="en-US" sz="1500" dirty="0">
-                <a:solidFill>
-                  <a:srgbClr val="14181F"/>
-                </a:solidFill>
-                <a:latin typeface="Calibri" pitchFamily="34" charset="0"/>
-                <a:ea typeface="Calibri" pitchFamily="34" charset="-122"/>
-                <a:cs typeface="Calibri" pitchFamily="34" charset="-120"/>
-              </a:rPr>
-              <a:t>Mọi con số sinh ra từ một phép đo có file trong repo, không có số nào gõ tay.</a:t>
-            </a:r>
-            <a:endParaRPr lang="en-US" sz="1500" dirty="0"/>
-          </a:p>
-        </p:txBody>
-      </p:sp>
-      <p:sp>
-        <p:nvSpPr>
-          <p:cNvPr id="21" name="Text 19"/>
-          <p:cNvSpPr/>
-          <p:nvPr/>
-        </p:nvSpPr>
-        <p:spPr>
-          <a:xfrm>
-            <a:off x="685800" y="4974336"/>
-            <a:ext cx="10820095" cy="365760"/>
-          </a:xfrm>
-          <a:prstGeom prst="rect">
-            <a:avLst/>
-          </a:prstGeom>
-          <a:noFill/>
-          <a:ln/>
-        </p:spPr>
-        <p:txBody>
-          <a:bodyPr wrap="square" lIns="0" tIns="0" rIns="0" bIns="0" rtlCol="0" anchor="ctr"/>
-          <a:lstStyle/>
-          <a:p>
-            <a:pPr indent="0" marL="0">
-              <a:buNone/>
-            </a:pPr>
-            <a:r>
-              <a:rPr lang="en-US" sz="1200" dirty="0">
-                <a:solidFill>
-                  <a:srgbClr val="B45309"/>
-                </a:solidFill>
-                <a:latin typeface="Consolas" pitchFamily="34" charset="0"/>
-                <a:ea typeface="Consolas" pitchFamily="34" charset="-122"/>
-                <a:cs typeface="Consolas" pitchFamily="34" charset="-120"/>
-              </a:rPr>
-              <a:t>neitln.github.io/Custos-Solana/so-lieu.html  —  mỗi con số kèm cách đo và ngày đo</a:t>
-            </a:r>
-            <a:endParaRPr lang="en-US" sz="1200" dirty="0"/>
-          </a:p>
-        </p:txBody>
-      </p:sp>
-      <p:sp>
-        <p:nvSpPr>
-          <p:cNvPr id="22" name="Text 20"/>
-          <p:cNvSpPr/>
-          <p:nvPr/>
-        </p:nvSpPr>
-        <p:spPr>
-          <a:xfrm>
-            <a:off x="685800" y="5413248"/>
-            <a:ext cx="10820095" cy="384048"/>
-          </a:xfrm>
-          <a:prstGeom prst="rect">
-            <a:avLst/>
-          </a:prstGeom>
-          <a:noFill/>
-          <a:ln/>
-        </p:spPr>
-        <p:txBody>
-          <a:bodyPr wrap="square" lIns="0" tIns="0" rIns="0" bIns="0" rtlCol="0" anchor="ctr"/>
-          <a:lstStyle/>
-          <a:p>
-            <a:pPr indent="0" marL="0">
-              <a:buNone/>
-            </a:pPr>
-            <a:r>
-              <a:rPr lang="en-US" sz="1300" i="1" dirty="0">
-                <a:solidFill>
-                  <a:srgbClr val="5E6673"/>
-                </a:solidFill>
-                <a:latin typeface="Calibri" pitchFamily="34" charset="0"/>
-                <a:ea typeface="Calibri" pitchFamily="34" charset="-122"/>
-                <a:cs typeface="Calibri" pitchFamily="34" charset="-120"/>
-              </a:rPr>
-              <a:t>Đã hỏi 20 người (29/08 và 30/08/2026): 13/20 nêu được hậu quả · 4/20 vẫn ký. Chưa ví/dApp nào cam kết tích hợp.</a:t>
-            </a:r>
-            <a:endParaRPr lang="en-US" sz="1300" dirty="0"/>
           </a:p>
         </p:txBody>
       </p:sp>

--- a/docs/nop-bai/CUSTOS-PITCH.pptx
+++ b/docs/nop-bai/CUSTOS-PITCH.pptx
@@ -2323,7 +2323,7 @@
                 <a:ea typeface="Trebuchet MS" pitchFamily="34" charset="-122"/>
                 <a:cs typeface="Trebuchet MS" pitchFamily="34" charset="-120"/>
               </a:rPr>
-              <a:t>467</a:t>
+              <a:t>473</a:t>
             </a:r>
             <a:endParaRPr lang="en-US" sz="4400" dirty="0"/>
           </a:p>

--- a/docs/nop-bai/CUSTOS-PITCH.pptx
+++ b/docs/nop-bai/CUSTOS-PITCH.pptx
@@ -2323,7 +2323,7 @@
                 <a:ea typeface="Trebuchet MS" pitchFamily="34" charset="-122"/>
                 <a:cs typeface="Trebuchet MS" pitchFamily="34" charset="-120"/>
               </a:rPr>
-              <a:t>473</a:t>
+              <a:t>478</a:t>
             </a:r>
             <a:endParaRPr lang="en-US" sz="4400" dirty="0"/>
           </a:p>

--- a/docs/nop-bai/CUSTOS-PITCH.pptx
+++ b/docs/nop-bai/CUSTOS-PITCH.pptx
@@ -2323,7 +2323,7 @@
                 <a:ea typeface="Trebuchet MS" pitchFamily="34" charset="-122"/>
                 <a:cs typeface="Trebuchet MS" pitchFamily="34" charset="-120"/>
               </a:rPr>
-              <a:t>478</a:t>
+              <a:t>483</a:t>
             </a:r>
             <a:endParaRPr lang="en-US" sz="4400" dirty="0"/>
           </a:p>

--- a/docs/nop-bai/CUSTOS-PITCH.pptx
+++ b/docs/nop-bai/CUSTOS-PITCH.pptx
@@ -2323,7 +2323,7 @@
                 <a:ea typeface="Trebuchet MS" pitchFamily="34" charset="-122"/>
                 <a:cs typeface="Trebuchet MS" pitchFamily="34" charset="-120"/>
               </a:rPr>
-              <a:t>483</a:t>
+              <a:t>487</a:t>
             </a:r>
             <a:endParaRPr lang="en-US" sz="4400" dirty="0"/>
           </a:p>
